--- a/econometrics/ch1/lm-modeling.pptx
+++ b/econometrics/ch1/lm-modeling.pptx
@@ -5815,6 +5815,13 @@
         </dgm:presLayoutVars>
       </dgm:prSet>
       <dgm:spPr/>
+      <dgm:t>
+        <a:bodyPr/>
+        <a:lstStyle/>
+        <a:p>
+          <a:endParaRPr lang="zh-CN" altLang="en-US"/>
+        </a:p>
+      </dgm:t>
     </dgm:pt>
     <dgm:pt modelId="{E699446F-D94B-43C6-B913-CBAC9E5B5C66}" type="pres">
       <dgm:prSet presAssocID="{4CCFAC2F-DD40-4738-AAF9-77D5BACDC306}" presName="thickLine" presStyleLbl="alignNode1" presStyleIdx="0" presStyleCnt="2"/>
@@ -5827,6 +5834,13 @@
     <dgm:pt modelId="{3B9C1ABC-7D4B-4D86-AF30-2BE774D3E8AB}" type="pres">
       <dgm:prSet presAssocID="{4CCFAC2F-DD40-4738-AAF9-77D5BACDC306}" presName="tx1" presStyleLbl="revTx" presStyleIdx="0" presStyleCnt="2"/>
       <dgm:spPr/>
+      <dgm:t>
+        <a:bodyPr/>
+        <a:lstStyle/>
+        <a:p>
+          <a:endParaRPr lang="zh-CN" altLang="en-US"/>
+        </a:p>
+      </dgm:t>
     </dgm:pt>
     <dgm:pt modelId="{C5FABA03-BC8D-46B4-B934-1153AD95FF90}" type="pres">
       <dgm:prSet presAssocID="{4CCFAC2F-DD40-4738-AAF9-77D5BACDC306}" presName="vert1" presStyleCnt="0"/>
@@ -5843,6 +5857,13 @@
     <dgm:pt modelId="{D6DF2559-2B74-4834-82EA-CC510802CE59}" type="pres">
       <dgm:prSet presAssocID="{26EB18BA-5CCF-41D0-94AC-F8071B823F31}" presName="tx1" presStyleLbl="revTx" presStyleIdx="1" presStyleCnt="2"/>
       <dgm:spPr/>
+      <dgm:t>
+        <a:bodyPr/>
+        <a:lstStyle/>
+        <a:p>
+          <a:endParaRPr lang="zh-CN" altLang="en-US"/>
+        </a:p>
+      </dgm:t>
     </dgm:pt>
     <dgm:pt modelId="{A1B11B59-B3DC-4A37-B023-9043E4B2D8B1}" type="pres">
       <dgm:prSet presAssocID="{26EB18BA-5CCF-41D0-94AC-F8071B823F31}" presName="vert1" presStyleCnt="0"/>
@@ -5850,11 +5871,11 @@
     </dgm:pt>
   </dgm:ptLst>
   <dgm:cxnLst>
-    <dgm:cxn modelId="{F2E8B20D-8668-4484-AD79-495832FD4513}" type="presOf" srcId="{4CCFAC2F-DD40-4738-AAF9-77D5BACDC306}" destId="{3B9C1ABC-7D4B-4D86-AF30-2BE774D3E8AB}" srcOrd="0" destOrd="0" presId="urn:microsoft.com/office/officeart/2008/layout/LinedList"/>
+    <dgm:cxn modelId="{2AF8F4B8-FFB2-424F-B65B-F5C687DDDBA5}" srcId="{437EBB95-20E4-4FC7-A702-2AA2D92E9D17}" destId="{4CCFAC2F-DD40-4738-AAF9-77D5BACDC306}" srcOrd="0" destOrd="0" parTransId="{31446CB6-7138-4ED6-B637-0DF44937DB9B}" sibTransId="{8B7B8EE4-1FE4-48E6-BA81-A2000DA41D17}"/>
     <dgm:cxn modelId="{0EE75210-ACE9-4E6C-9C01-0A0073469454}" srcId="{437EBB95-20E4-4FC7-A702-2AA2D92E9D17}" destId="{26EB18BA-5CCF-41D0-94AC-F8071B823F31}" srcOrd="1" destOrd="0" parTransId="{048CC42A-B77F-440B-B5AD-D4B7E4331BD9}" sibTransId="{5CC7FDD6-2EC4-405A-B21E-A21943DB3872}"/>
     <dgm:cxn modelId="{CAC8ED4C-DC9A-432E-AA7C-A402A61A33F4}" type="presOf" srcId="{26EB18BA-5CCF-41D0-94AC-F8071B823F31}" destId="{D6DF2559-2B74-4834-82EA-CC510802CE59}" srcOrd="0" destOrd="0" presId="urn:microsoft.com/office/officeart/2008/layout/LinedList"/>
+    <dgm:cxn modelId="{F2E8B20D-8668-4484-AD79-495832FD4513}" type="presOf" srcId="{4CCFAC2F-DD40-4738-AAF9-77D5BACDC306}" destId="{3B9C1ABC-7D4B-4D86-AF30-2BE774D3E8AB}" srcOrd="0" destOrd="0" presId="urn:microsoft.com/office/officeart/2008/layout/LinedList"/>
     <dgm:cxn modelId="{DAE19E53-669A-4A02-A763-B6B5F5D4E26D}" type="presOf" srcId="{437EBB95-20E4-4FC7-A702-2AA2D92E9D17}" destId="{972CCF25-F886-42AF-AC14-548673339678}" srcOrd="0" destOrd="0" presId="urn:microsoft.com/office/officeart/2008/layout/LinedList"/>
-    <dgm:cxn modelId="{2AF8F4B8-FFB2-424F-B65B-F5C687DDDBA5}" srcId="{437EBB95-20E4-4FC7-A702-2AA2D92E9D17}" destId="{4CCFAC2F-DD40-4738-AAF9-77D5BACDC306}" srcOrd="0" destOrd="0" parTransId="{31446CB6-7138-4ED6-B637-0DF44937DB9B}" sibTransId="{8B7B8EE4-1FE4-48E6-BA81-A2000DA41D17}"/>
     <dgm:cxn modelId="{6E2B1C08-B47E-4060-AFF0-5B4003A8FE15}" type="presParOf" srcId="{972CCF25-F886-42AF-AC14-548673339678}" destId="{E699446F-D94B-43C6-B913-CBAC9E5B5C66}" srcOrd="0" destOrd="0" presId="urn:microsoft.com/office/officeart/2008/layout/LinedList"/>
     <dgm:cxn modelId="{98E013C4-AC05-4B97-BA32-90C29121011C}" type="presParOf" srcId="{972CCF25-F886-42AF-AC14-548673339678}" destId="{4F3370F9-6ADB-4751-96D3-B0E1EFCDF6ED}" srcOrd="1" destOrd="0" presId="urn:microsoft.com/office/officeart/2008/layout/LinedList"/>
     <dgm:cxn modelId="{068F54FE-A010-469E-8C75-6FEFBF3BD410}" type="presParOf" srcId="{4F3370F9-6ADB-4751-96D3-B0E1EFCDF6ED}" destId="{3B9C1ABC-7D4B-4D86-AF30-2BE774D3E8AB}" srcOrd="0" destOrd="0" presId="urn:microsoft.com/office/officeart/2008/layout/LinedList"/>
@@ -6048,6 +6069,13 @@
         </dgm:presLayoutVars>
       </dgm:prSet>
       <dgm:spPr/>
+      <dgm:t>
+        <a:bodyPr/>
+        <a:lstStyle/>
+        <a:p>
+          <a:endParaRPr lang="zh-CN" altLang="en-US"/>
+        </a:p>
+      </dgm:t>
     </dgm:pt>
     <dgm:pt modelId="{DF77E766-A28A-4E69-83C8-AE957A800CFC}" type="pres">
       <dgm:prSet presAssocID="{0C4818E5-49D2-47EC-ABE5-3BC8894C62CD}" presName="hierRoot1" presStyleCnt="0">
@@ -6068,10 +6096,24 @@
         </dgm:presLayoutVars>
       </dgm:prSet>
       <dgm:spPr/>
+      <dgm:t>
+        <a:bodyPr/>
+        <a:lstStyle/>
+        <a:p>
+          <a:endParaRPr lang="zh-CN" altLang="en-US"/>
+        </a:p>
+      </dgm:t>
     </dgm:pt>
     <dgm:pt modelId="{D679A141-BF88-4AE5-A099-90FF449E66B2}" type="pres">
       <dgm:prSet presAssocID="{0C4818E5-49D2-47EC-ABE5-3BC8894C62CD}" presName="rootConnector1" presStyleLbl="node1" presStyleIdx="0" presStyleCnt="0"/>
       <dgm:spPr/>
+      <dgm:t>
+        <a:bodyPr/>
+        <a:lstStyle/>
+        <a:p>
+          <a:endParaRPr lang="zh-CN" altLang="en-US"/>
+        </a:p>
+      </dgm:t>
     </dgm:pt>
     <dgm:pt modelId="{9A2FA24F-491C-47BA-B09F-34F5CC7925F2}" type="pres">
       <dgm:prSet presAssocID="{0C4818E5-49D2-47EC-ABE5-3BC8894C62CD}" presName="hierChild2" presStyleCnt="0"/>
@@ -6100,10 +6142,24 @@
         </dgm:presLayoutVars>
       </dgm:prSet>
       <dgm:spPr/>
+      <dgm:t>
+        <a:bodyPr/>
+        <a:lstStyle/>
+        <a:p>
+          <a:endParaRPr lang="zh-CN" altLang="en-US"/>
+        </a:p>
+      </dgm:t>
     </dgm:pt>
     <dgm:pt modelId="{15F6EFE7-2E28-463E-A420-66EADA6B814C}" type="pres">
       <dgm:prSet presAssocID="{C7D693B8-8D17-46B9-88A6-E361B882F955}" presName="rootConnector1" presStyleLbl="node1" presStyleIdx="0" presStyleCnt="0"/>
       <dgm:spPr/>
+      <dgm:t>
+        <a:bodyPr/>
+        <a:lstStyle/>
+        <a:p>
+          <a:endParaRPr lang="zh-CN" altLang="en-US"/>
+        </a:p>
+      </dgm:t>
     </dgm:pt>
     <dgm:pt modelId="{5104EBA7-CA7A-46AC-8865-16703F8E5A4B}" type="pres">
       <dgm:prSet presAssocID="{C7D693B8-8D17-46B9-88A6-E361B882F955}" presName="hierChild2" presStyleCnt="0"/>
@@ -6112,6 +6168,13 @@
     <dgm:pt modelId="{DC940141-9842-450E-898E-2C69BC91D56B}" type="pres">
       <dgm:prSet presAssocID="{87E3B49E-796D-4C74-B053-E3DDD9916C70}" presName="Name64" presStyleLbl="parChTrans1D2" presStyleIdx="0" presStyleCnt="2"/>
       <dgm:spPr/>
+      <dgm:t>
+        <a:bodyPr/>
+        <a:lstStyle/>
+        <a:p>
+          <a:endParaRPr lang="zh-CN" altLang="en-US"/>
+        </a:p>
+      </dgm:t>
     </dgm:pt>
     <dgm:pt modelId="{7C11AE79-8FDA-4D9A-AD4E-23AD930338D5}" type="pres">
       <dgm:prSet presAssocID="{949040E6-47FA-45F1-B4F7-DCFE8C13A9E4}" presName="hierRoot2" presStyleCnt="0">
@@ -6132,10 +6195,24 @@
         </dgm:presLayoutVars>
       </dgm:prSet>
       <dgm:spPr/>
+      <dgm:t>
+        <a:bodyPr/>
+        <a:lstStyle/>
+        <a:p>
+          <a:endParaRPr lang="zh-CN" altLang="en-US"/>
+        </a:p>
+      </dgm:t>
     </dgm:pt>
     <dgm:pt modelId="{F2E764ED-5D27-489E-A63D-5A4288A08FE9}" type="pres">
       <dgm:prSet presAssocID="{949040E6-47FA-45F1-B4F7-DCFE8C13A9E4}" presName="rootConnector" presStyleLbl="node2" presStyleIdx="0" presStyleCnt="2"/>
       <dgm:spPr/>
+      <dgm:t>
+        <a:bodyPr/>
+        <a:lstStyle/>
+        <a:p>
+          <a:endParaRPr lang="zh-CN" altLang="en-US"/>
+        </a:p>
+      </dgm:t>
     </dgm:pt>
     <dgm:pt modelId="{9BA9962A-7788-49C6-9055-82D3519040BC}" type="pres">
       <dgm:prSet presAssocID="{949040E6-47FA-45F1-B4F7-DCFE8C13A9E4}" presName="hierChild4" presStyleCnt="0"/>
@@ -6148,6 +6225,13 @@
     <dgm:pt modelId="{8E5383E9-D1C2-492B-B9C4-76D855335860}" type="pres">
       <dgm:prSet presAssocID="{6BC5272C-5E45-4C80-A413-9B13BE5A4B41}" presName="Name64" presStyleLbl="parChTrans1D2" presStyleIdx="1" presStyleCnt="2"/>
       <dgm:spPr/>
+      <dgm:t>
+        <a:bodyPr/>
+        <a:lstStyle/>
+        <a:p>
+          <a:endParaRPr lang="zh-CN" altLang="en-US"/>
+        </a:p>
+      </dgm:t>
     </dgm:pt>
     <dgm:pt modelId="{C20537A3-6206-431C-ACD7-3B7B59F19823}" type="pres">
       <dgm:prSet presAssocID="{0FD5F827-719C-40A9-8E1B-9A46215FBE4A}" presName="hierRoot2" presStyleCnt="0">
@@ -6168,10 +6252,24 @@
         </dgm:presLayoutVars>
       </dgm:prSet>
       <dgm:spPr/>
+      <dgm:t>
+        <a:bodyPr/>
+        <a:lstStyle/>
+        <a:p>
+          <a:endParaRPr lang="zh-CN" altLang="en-US"/>
+        </a:p>
+      </dgm:t>
     </dgm:pt>
     <dgm:pt modelId="{C01EDDC5-85B1-4A53-845E-C507315E8D74}" type="pres">
       <dgm:prSet presAssocID="{0FD5F827-719C-40A9-8E1B-9A46215FBE4A}" presName="rootConnector" presStyleLbl="node2" presStyleIdx="1" presStyleCnt="2"/>
       <dgm:spPr/>
+      <dgm:t>
+        <a:bodyPr/>
+        <a:lstStyle/>
+        <a:p>
+          <a:endParaRPr lang="zh-CN" altLang="en-US"/>
+        </a:p>
+      </dgm:t>
     </dgm:pt>
     <dgm:pt modelId="{E5F7FF32-0D4B-4457-8F02-28A3834809FD}" type="pres">
       <dgm:prSet presAssocID="{0FD5F827-719C-40A9-8E1B-9A46215FBE4A}" presName="hierChild4" presStyleCnt="0"/>
@@ -6187,21 +6285,21 @@
     </dgm:pt>
   </dgm:ptLst>
   <dgm:cxnLst>
+    <dgm:cxn modelId="{92034A7F-C516-4688-9C89-9B1AE45EAC5B}" type="presOf" srcId="{0C4818E5-49D2-47EC-ABE5-3BC8894C62CD}" destId="{D679A141-BF88-4AE5-A099-90FF449E66B2}" srcOrd="1" destOrd="0" presId="urn:microsoft.com/office/officeart/2009/3/layout/HorizontalOrganizationChart"/>
+    <dgm:cxn modelId="{1B80FBFF-247C-4648-BD1D-1BA04F66550A}" type="presOf" srcId="{87E3B49E-796D-4C74-B053-E3DDD9916C70}" destId="{DC940141-9842-450E-898E-2C69BC91D56B}" srcOrd="0" destOrd="0" presId="urn:microsoft.com/office/officeart/2009/3/layout/HorizontalOrganizationChart"/>
+    <dgm:cxn modelId="{9A8D7A72-0A84-48AC-A6FB-B5C3D5B1581A}" type="presOf" srcId="{949040E6-47FA-45F1-B4F7-DCFE8C13A9E4}" destId="{F2E764ED-5D27-489E-A63D-5A4288A08FE9}" srcOrd="1" destOrd="0" presId="urn:microsoft.com/office/officeart/2009/3/layout/HorizontalOrganizationChart"/>
+    <dgm:cxn modelId="{9C06243D-90FB-4023-8679-4A5FA9A9E91C}" srcId="{C3650290-E7A1-4983-9F6D-AEB20AC52AAA}" destId="{C7D693B8-8D17-46B9-88A6-E361B882F955}" srcOrd="1" destOrd="0" parTransId="{867A344A-A25E-4580-A01B-7FAC2C03E893}" sibTransId="{5097680C-7910-49D6-9F82-2FFC5BB3EDD8}"/>
+    <dgm:cxn modelId="{D8A949B5-983A-4F4B-A44F-F0E98B96EBA1}" type="presOf" srcId="{C7D693B8-8D17-46B9-88A6-E361B882F955}" destId="{34B500FB-07E1-4C64-88A9-3A5D76DC67D0}" srcOrd="0" destOrd="0" presId="urn:microsoft.com/office/officeart/2009/3/layout/HorizontalOrganizationChart"/>
+    <dgm:cxn modelId="{4A73549C-9D8A-4F6D-84CF-30283132A8AA}" type="presOf" srcId="{949040E6-47FA-45F1-B4F7-DCFE8C13A9E4}" destId="{CA65ECCF-E4C2-43BA-BD36-0922DEB515E2}" srcOrd="0" destOrd="0" presId="urn:microsoft.com/office/officeart/2009/3/layout/HorizontalOrganizationChart"/>
+    <dgm:cxn modelId="{7A54050E-8D14-413C-92AF-D7A1D73D69F2}" srcId="{C7D693B8-8D17-46B9-88A6-E361B882F955}" destId="{0FD5F827-719C-40A9-8E1B-9A46215FBE4A}" srcOrd="1" destOrd="0" parTransId="{6BC5272C-5E45-4C80-A413-9B13BE5A4B41}" sibTransId="{BECE489B-F505-4F13-92DA-CB608B8019F9}"/>
+    <dgm:cxn modelId="{A31B40F1-48E3-4BEE-87D4-A5B2A8B95ABB}" srcId="{C3650290-E7A1-4983-9F6D-AEB20AC52AAA}" destId="{0C4818E5-49D2-47EC-ABE5-3BC8894C62CD}" srcOrd="0" destOrd="0" parTransId="{5C041F75-90A6-4C20-9008-14E05EBBE88E}" sibTransId="{73284E1D-CE0B-43FB-BEC7-E3BADC94CE45}"/>
+    <dgm:cxn modelId="{F8915132-4FC4-47FC-AAC8-44823ED1C27E}" type="presOf" srcId="{C7D693B8-8D17-46B9-88A6-E361B882F955}" destId="{15F6EFE7-2E28-463E-A420-66EADA6B814C}" srcOrd="1" destOrd="0" presId="urn:microsoft.com/office/officeart/2009/3/layout/HorizontalOrganizationChart"/>
+    <dgm:cxn modelId="{A5A7DF2B-9A4E-4556-81FE-6270A44E5D9B}" srcId="{C7D693B8-8D17-46B9-88A6-E361B882F955}" destId="{949040E6-47FA-45F1-B4F7-DCFE8C13A9E4}" srcOrd="0" destOrd="0" parTransId="{87E3B49E-796D-4C74-B053-E3DDD9916C70}" sibTransId="{DBDCD0C3-C00A-4B2D-9E88-C9FD02B87D01}"/>
+    <dgm:cxn modelId="{715F838A-955D-47E0-96EF-DBBF57448A5F}" type="presOf" srcId="{0FD5F827-719C-40A9-8E1B-9A46215FBE4A}" destId="{FC10CCDF-1555-4220-9B76-9E3205FDC0EB}" srcOrd="0" destOrd="0" presId="urn:microsoft.com/office/officeart/2009/3/layout/HorizontalOrganizationChart"/>
     <dgm:cxn modelId="{D452D503-E79F-41C7-A96D-9DE1A49E3C6D}" type="presOf" srcId="{6BC5272C-5E45-4C80-A413-9B13BE5A4B41}" destId="{8E5383E9-D1C2-492B-B9C4-76D855335860}" srcOrd="0" destOrd="0" presId="urn:microsoft.com/office/officeart/2009/3/layout/HorizontalOrganizationChart"/>
-    <dgm:cxn modelId="{7A54050E-8D14-413C-92AF-D7A1D73D69F2}" srcId="{C7D693B8-8D17-46B9-88A6-E361B882F955}" destId="{0FD5F827-719C-40A9-8E1B-9A46215FBE4A}" srcOrd="1" destOrd="0" parTransId="{6BC5272C-5E45-4C80-A413-9B13BE5A4B41}" sibTransId="{BECE489B-F505-4F13-92DA-CB608B8019F9}"/>
+    <dgm:cxn modelId="{08BA26AC-0C1A-48CF-B3AA-9733C3E7EF3B}" type="presOf" srcId="{0FD5F827-719C-40A9-8E1B-9A46215FBE4A}" destId="{C01EDDC5-85B1-4A53-845E-C507315E8D74}" srcOrd="1" destOrd="0" presId="urn:microsoft.com/office/officeart/2009/3/layout/HorizontalOrganizationChart"/>
     <dgm:cxn modelId="{DA9E7A17-1361-4847-838E-B24C8A983F7A}" type="presOf" srcId="{C3650290-E7A1-4983-9F6D-AEB20AC52AAA}" destId="{EB3434A0-9B10-4AE3-8F5D-82764AC5A306}" srcOrd="0" destOrd="0" presId="urn:microsoft.com/office/officeart/2009/3/layout/HorizontalOrganizationChart"/>
-    <dgm:cxn modelId="{A5A7DF2B-9A4E-4556-81FE-6270A44E5D9B}" srcId="{C7D693B8-8D17-46B9-88A6-E361B882F955}" destId="{949040E6-47FA-45F1-B4F7-DCFE8C13A9E4}" srcOrd="0" destOrd="0" parTransId="{87E3B49E-796D-4C74-B053-E3DDD9916C70}" sibTransId="{DBDCD0C3-C00A-4B2D-9E88-C9FD02B87D01}"/>
-    <dgm:cxn modelId="{F8915132-4FC4-47FC-AAC8-44823ED1C27E}" type="presOf" srcId="{C7D693B8-8D17-46B9-88A6-E361B882F955}" destId="{15F6EFE7-2E28-463E-A420-66EADA6B814C}" srcOrd="1" destOrd="0" presId="urn:microsoft.com/office/officeart/2009/3/layout/HorizontalOrganizationChart"/>
-    <dgm:cxn modelId="{9C06243D-90FB-4023-8679-4A5FA9A9E91C}" srcId="{C3650290-E7A1-4983-9F6D-AEB20AC52AAA}" destId="{C7D693B8-8D17-46B9-88A6-E361B882F955}" srcOrd="1" destOrd="0" parTransId="{867A344A-A25E-4580-A01B-7FAC2C03E893}" sibTransId="{5097680C-7910-49D6-9F82-2FFC5BB3EDD8}"/>
     <dgm:cxn modelId="{C75EE95E-FF25-4AAC-8584-D78EDECAEB7E}" type="presOf" srcId="{0C4818E5-49D2-47EC-ABE5-3BC8894C62CD}" destId="{15B8F517-71CB-4CF7-9FFB-9EE33CC69E78}" srcOrd="0" destOrd="0" presId="urn:microsoft.com/office/officeart/2009/3/layout/HorizontalOrganizationChart"/>
-    <dgm:cxn modelId="{9A8D7A72-0A84-48AC-A6FB-B5C3D5B1581A}" type="presOf" srcId="{949040E6-47FA-45F1-B4F7-DCFE8C13A9E4}" destId="{F2E764ED-5D27-489E-A63D-5A4288A08FE9}" srcOrd="1" destOrd="0" presId="urn:microsoft.com/office/officeart/2009/3/layout/HorizontalOrganizationChart"/>
-    <dgm:cxn modelId="{92034A7F-C516-4688-9C89-9B1AE45EAC5B}" type="presOf" srcId="{0C4818E5-49D2-47EC-ABE5-3BC8894C62CD}" destId="{D679A141-BF88-4AE5-A099-90FF449E66B2}" srcOrd="1" destOrd="0" presId="urn:microsoft.com/office/officeart/2009/3/layout/HorizontalOrganizationChart"/>
-    <dgm:cxn modelId="{715F838A-955D-47E0-96EF-DBBF57448A5F}" type="presOf" srcId="{0FD5F827-719C-40A9-8E1B-9A46215FBE4A}" destId="{FC10CCDF-1555-4220-9B76-9E3205FDC0EB}" srcOrd="0" destOrd="0" presId="urn:microsoft.com/office/officeart/2009/3/layout/HorizontalOrganizationChart"/>
-    <dgm:cxn modelId="{4A73549C-9D8A-4F6D-84CF-30283132A8AA}" type="presOf" srcId="{949040E6-47FA-45F1-B4F7-DCFE8C13A9E4}" destId="{CA65ECCF-E4C2-43BA-BD36-0922DEB515E2}" srcOrd="0" destOrd="0" presId="urn:microsoft.com/office/officeart/2009/3/layout/HorizontalOrganizationChart"/>
-    <dgm:cxn modelId="{08BA26AC-0C1A-48CF-B3AA-9733C3E7EF3B}" type="presOf" srcId="{0FD5F827-719C-40A9-8E1B-9A46215FBE4A}" destId="{C01EDDC5-85B1-4A53-845E-C507315E8D74}" srcOrd="1" destOrd="0" presId="urn:microsoft.com/office/officeart/2009/3/layout/HorizontalOrganizationChart"/>
-    <dgm:cxn modelId="{D8A949B5-983A-4F4B-A44F-F0E98B96EBA1}" type="presOf" srcId="{C7D693B8-8D17-46B9-88A6-E361B882F955}" destId="{34B500FB-07E1-4C64-88A9-3A5D76DC67D0}" srcOrd="0" destOrd="0" presId="urn:microsoft.com/office/officeart/2009/3/layout/HorizontalOrganizationChart"/>
-    <dgm:cxn modelId="{A31B40F1-48E3-4BEE-87D4-A5B2A8B95ABB}" srcId="{C3650290-E7A1-4983-9F6D-AEB20AC52AAA}" destId="{0C4818E5-49D2-47EC-ABE5-3BC8894C62CD}" srcOrd="0" destOrd="0" parTransId="{5C041F75-90A6-4C20-9008-14E05EBBE88E}" sibTransId="{73284E1D-CE0B-43FB-BEC7-E3BADC94CE45}"/>
-    <dgm:cxn modelId="{1B80FBFF-247C-4648-BD1D-1BA04F66550A}" type="presOf" srcId="{87E3B49E-796D-4C74-B053-E3DDD9916C70}" destId="{DC940141-9842-450E-898E-2C69BC91D56B}" srcOrd="0" destOrd="0" presId="urn:microsoft.com/office/officeart/2009/3/layout/HorizontalOrganizationChart"/>
     <dgm:cxn modelId="{E3245C55-1E0E-49C6-B90A-C7774D498C52}" type="presParOf" srcId="{EB3434A0-9B10-4AE3-8F5D-82764AC5A306}" destId="{DF77E766-A28A-4E69-83C8-AE957A800CFC}" srcOrd="0" destOrd="0" presId="urn:microsoft.com/office/officeart/2009/3/layout/HorizontalOrganizationChart"/>
     <dgm:cxn modelId="{DCA31E44-D2CF-4F95-94B7-6D45A6932C29}" type="presParOf" srcId="{DF77E766-A28A-4E69-83C8-AE957A800CFC}" destId="{4F72C8B1-E07C-4B2B-8FFA-305A7B72C089}" srcOrd="0" destOrd="0" presId="urn:microsoft.com/office/officeart/2009/3/layout/HorizontalOrganizationChart"/>
     <dgm:cxn modelId="{AB42E395-B2D3-4A1C-9164-5E4A3D9ADA8F}" type="presParOf" srcId="{4F72C8B1-E07C-4B2B-8FFA-305A7B72C089}" destId="{15B8F517-71CB-4CF7-9FFB-9EE33CC69E78}" srcOrd="0" destOrd="0" presId="urn:microsoft.com/office/officeart/2009/3/layout/HorizontalOrganizationChart"/>
@@ -6338,6 +6436,13 @@
         </dgm:presLayoutVars>
       </dgm:prSet>
       <dgm:spPr/>
+      <dgm:t>
+        <a:bodyPr/>
+        <a:lstStyle/>
+        <a:p>
+          <a:endParaRPr lang="zh-CN" altLang="en-US"/>
+        </a:p>
+      </dgm:t>
     </dgm:pt>
     <dgm:pt modelId="{0F2E739F-B7E9-4705-A0C7-64BD2526E965}" type="pres">
       <dgm:prSet presAssocID="{EB313478-C101-4143-A181-3B5730F2504D}" presName="hierRoot1" presStyleCnt="0"/>
@@ -6358,6 +6463,13 @@
         </dgm:presLayoutVars>
       </dgm:prSet>
       <dgm:spPr/>
+      <dgm:t>
+        <a:bodyPr/>
+        <a:lstStyle/>
+        <a:p>
+          <a:endParaRPr lang="zh-CN" altLang="en-US"/>
+        </a:p>
+      </dgm:t>
     </dgm:pt>
     <dgm:pt modelId="{4CF28E76-F695-4BB3-BAE1-A08C92BC1818}" type="pres">
       <dgm:prSet presAssocID="{EB313478-C101-4143-A181-3B5730F2504D}" presName="hierChild2" presStyleCnt="0"/>
@@ -6382,6 +6494,13 @@
         </dgm:presLayoutVars>
       </dgm:prSet>
       <dgm:spPr/>
+      <dgm:t>
+        <a:bodyPr/>
+        <a:lstStyle/>
+        <a:p>
+          <a:endParaRPr lang="zh-CN" altLang="en-US"/>
+        </a:p>
+      </dgm:t>
     </dgm:pt>
     <dgm:pt modelId="{A397FA45-641A-4A70-B142-DE77487909E3}" type="pres">
       <dgm:prSet presAssocID="{33CE3BA8-7F44-406C-9B4E-5B8ABF141E41}" presName="hierChild2" presStyleCnt="0"/>
@@ -6389,11 +6508,11 @@
     </dgm:pt>
   </dgm:ptLst>
   <dgm:cxnLst>
+    <dgm:cxn modelId="{93D943FB-245E-4C90-8E27-E8BDC3D76B40}" type="presOf" srcId="{33CE3BA8-7F44-406C-9B4E-5B8ABF141E41}" destId="{C4FC89FC-A17C-436C-8504-CBBAEE8ABDA8}" srcOrd="0" destOrd="0" presId="urn:microsoft.com/office/officeart/2005/8/layout/hierarchy1"/>
+    <dgm:cxn modelId="{B785B092-E096-4749-80DC-1217EF5FED24}" type="presOf" srcId="{41225508-3917-4A1B-86A7-BC0F02998490}" destId="{3B4B158C-2AF7-4ED3-A4BC-76EBE8E0049D}" srcOrd="0" destOrd="0" presId="urn:microsoft.com/office/officeart/2005/8/layout/hierarchy1"/>
+    <dgm:cxn modelId="{20A99CC4-E3EF-440C-80AA-871AB607C030}" srcId="{41225508-3917-4A1B-86A7-BC0F02998490}" destId="{33CE3BA8-7F44-406C-9B4E-5B8ABF141E41}" srcOrd="1" destOrd="0" parTransId="{47EE8D95-D522-42F6-A97B-FAC7E394B4E5}" sibTransId="{DBAB53EE-936F-401F-89E8-15622FC2E90A}"/>
     <dgm:cxn modelId="{88A6562F-C892-46E7-90A2-7E25042FB2B2}" type="presOf" srcId="{EB313478-C101-4143-A181-3B5730F2504D}" destId="{D54CE7E5-001F-4363-BBB4-DC1C7B952812}" srcOrd="0" destOrd="0" presId="urn:microsoft.com/office/officeart/2005/8/layout/hierarchy1"/>
     <dgm:cxn modelId="{A4C3B980-D6A9-4125-923D-066B56372E21}" srcId="{41225508-3917-4A1B-86A7-BC0F02998490}" destId="{EB313478-C101-4143-A181-3B5730F2504D}" srcOrd="0" destOrd="0" parTransId="{2FD7B6F3-36C5-4983-A76E-97666BAC6596}" sibTransId="{05A0B330-938E-4A66-8051-90AD25303A8B}"/>
-    <dgm:cxn modelId="{B785B092-E096-4749-80DC-1217EF5FED24}" type="presOf" srcId="{41225508-3917-4A1B-86A7-BC0F02998490}" destId="{3B4B158C-2AF7-4ED3-A4BC-76EBE8E0049D}" srcOrd="0" destOrd="0" presId="urn:microsoft.com/office/officeart/2005/8/layout/hierarchy1"/>
-    <dgm:cxn modelId="{20A99CC4-E3EF-440C-80AA-871AB607C030}" srcId="{41225508-3917-4A1B-86A7-BC0F02998490}" destId="{33CE3BA8-7F44-406C-9B4E-5B8ABF141E41}" srcOrd="1" destOrd="0" parTransId="{47EE8D95-D522-42F6-A97B-FAC7E394B4E5}" sibTransId="{DBAB53EE-936F-401F-89E8-15622FC2E90A}"/>
-    <dgm:cxn modelId="{93D943FB-245E-4C90-8E27-E8BDC3D76B40}" type="presOf" srcId="{33CE3BA8-7F44-406C-9B4E-5B8ABF141E41}" destId="{C4FC89FC-A17C-436C-8504-CBBAEE8ABDA8}" srcOrd="0" destOrd="0" presId="urn:microsoft.com/office/officeart/2005/8/layout/hierarchy1"/>
     <dgm:cxn modelId="{B2808DB1-7204-41E4-A2CF-31CB9D9493C9}" type="presParOf" srcId="{3B4B158C-2AF7-4ED3-A4BC-76EBE8E0049D}" destId="{0F2E739F-B7E9-4705-A0C7-64BD2526E965}" srcOrd="0" destOrd="0" presId="urn:microsoft.com/office/officeart/2005/8/layout/hierarchy1"/>
     <dgm:cxn modelId="{C24A84E2-C1F1-43D4-9CC6-B4F216A84A12}" type="presParOf" srcId="{0F2E739F-B7E9-4705-A0C7-64BD2526E965}" destId="{96A18433-56EC-4C32-A5C3-06AD309E88E0}" srcOrd="0" destOrd="0" presId="urn:microsoft.com/office/officeart/2005/8/layout/hierarchy1"/>
     <dgm:cxn modelId="{442EA957-2EEE-4CFC-B488-4F46C109C055}" type="presParOf" srcId="{96A18433-56EC-4C32-A5C3-06AD309E88E0}" destId="{A82718A3-0D24-4687-8291-611045B97C1E}" srcOrd="0" destOrd="0" presId="urn:microsoft.com/office/officeart/2005/8/layout/hierarchy1"/>
@@ -6605,6 +6724,13 @@
         </dgm:presLayoutVars>
       </dgm:prSet>
       <dgm:spPr/>
+      <dgm:t>
+        <a:bodyPr/>
+        <a:lstStyle/>
+        <a:p>
+          <a:endParaRPr lang="zh-CN" altLang="en-US"/>
+        </a:p>
+      </dgm:t>
     </dgm:pt>
     <dgm:pt modelId="{640B4CD6-3794-40CE-AE35-24ABF7A85C3C}" type="pres">
       <dgm:prSet presAssocID="{0F2DA911-8E33-4259-B325-6E4A10F126D3}" presName="compositeNode" presStyleCnt="0">
@@ -6617,6 +6743,13 @@
     <dgm:pt modelId="{0A2BC4C9-EA61-4A11-BF75-CFD5956C27E1}" type="pres">
       <dgm:prSet presAssocID="{0F2DA911-8E33-4259-B325-6E4A10F126D3}" presName="bgRect" presStyleLbl="bgAccFollowNode1" presStyleIdx="0" presStyleCnt="3"/>
       <dgm:spPr/>
+      <dgm:t>
+        <a:bodyPr/>
+        <a:lstStyle/>
+        <a:p>
+          <a:endParaRPr lang="zh-CN" altLang="en-US"/>
+        </a:p>
+      </dgm:t>
     </dgm:pt>
     <dgm:pt modelId="{AD253F57-FFA0-4C6D-BF84-AE4FD9F326FA}" type="pres">
       <dgm:prSet presAssocID="{59C83618-1207-40E0-ADE0-FD8F92233051}" presName="sibTransNodeCircle" presStyleLbl="alignNode1" presStyleIdx="0" presStyleCnt="6">
@@ -6626,6 +6759,13 @@
         </dgm:presLayoutVars>
       </dgm:prSet>
       <dgm:spPr/>
+      <dgm:t>
+        <a:bodyPr/>
+        <a:lstStyle/>
+        <a:p>
+          <a:endParaRPr lang="zh-CN" altLang="en-US"/>
+        </a:p>
+      </dgm:t>
     </dgm:pt>
     <dgm:pt modelId="{D9EF7959-CCBA-4911-818C-EB5AE148DA91}" type="pres">
       <dgm:prSet presAssocID="{0F2DA911-8E33-4259-B325-6E4A10F126D3}" presName="bottomLine" presStyleLbl="alignNode1" presStyleIdx="1" presStyleCnt="6">
@@ -6640,6 +6780,13 @@
         </dgm:presLayoutVars>
       </dgm:prSet>
       <dgm:spPr/>
+      <dgm:t>
+        <a:bodyPr/>
+        <a:lstStyle/>
+        <a:p>
+          <a:endParaRPr lang="zh-CN" altLang="en-US"/>
+        </a:p>
+      </dgm:t>
     </dgm:pt>
     <dgm:pt modelId="{469840E5-D176-403C-97DA-6321D5133D45}" type="pres">
       <dgm:prSet presAssocID="{59C83618-1207-40E0-ADE0-FD8F92233051}" presName="sibTrans" presStyleCnt="0"/>
@@ -6656,6 +6803,13 @@
     <dgm:pt modelId="{2E44CF34-F98F-454B-B1FE-92DD3A1C239B}" type="pres">
       <dgm:prSet presAssocID="{D7BC4027-08A6-47EB-8ECA-1C7BA072A71C}" presName="bgRect" presStyleLbl="bgAccFollowNode1" presStyleIdx="1" presStyleCnt="3"/>
       <dgm:spPr/>
+      <dgm:t>
+        <a:bodyPr/>
+        <a:lstStyle/>
+        <a:p>
+          <a:endParaRPr lang="zh-CN" altLang="en-US"/>
+        </a:p>
+      </dgm:t>
     </dgm:pt>
     <dgm:pt modelId="{DB049BFF-BB21-47C5-B9AE-EDCF88EE83C1}" type="pres">
       <dgm:prSet presAssocID="{D6BEEE7C-4F06-4C75-B0FD-BC998B761B7B}" presName="sibTransNodeCircle" presStyleLbl="alignNode1" presStyleIdx="2" presStyleCnt="6">
@@ -6665,6 +6819,13 @@
         </dgm:presLayoutVars>
       </dgm:prSet>
       <dgm:spPr/>
+      <dgm:t>
+        <a:bodyPr/>
+        <a:lstStyle/>
+        <a:p>
+          <a:endParaRPr lang="zh-CN" altLang="en-US"/>
+        </a:p>
+      </dgm:t>
     </dgm:pt>
     <dgm:pt modelId="{EA81C03D-0DFB-4C6F-8CED-8BC0B35CBB89}" type="pres">
       <dgm:prSet presAssocID="{D7BC4027-08A6-47EB-8ECA-1C7BA072A71C}" presName="bottomLine" presStyleLbl="alignNode1" presStyleIdx="3" presStyleCnt="6">
@@ -6679,6 +6840,13 @@
         </dgm:presLayoutVars>
       </dgm:prSet>
       <dgm:spPr/>
+      <dgm:t>
+        <a:bodyPr/>
+        <a:lstStyle/>
+        <a:p>
+          <a:endParaRPr lang="zh-CN" altLang="en-US"/>
+        </a:p>
+      </dgm:t>
     </dgm:pt>
     <dgm:pt modelId="{6679081D-686F-4607-969F-B50C84CC86D3}" type="pres">
       <dgm:prSet presAssocID="{D6BEEE7C-4F06-4C75-B0FD-BC998B761B7B}" presName="sibTrans" presStyleCnt="0"/>
@@ -6695,6 +6863,13 @@
     <dgm:pt modelId="{8F931957-55EB-4933-9B79-47C477407CC9}" type="pres">
       <dgm:prSet presAssocID="{A766B676-93F1-40ED-84D0-3915D1D20D2C}" presName="bgRect" presStyleLbl="bgAccFollowNode1" presStyleIdx="2" presStyleCnt="3"/>
       <dgm:spPr/>
+      <dgm:t>
+        <a:bodyPr/>
+        <a:lstStyle/>
+        <a:p>
+          <a:endParaRPr lang="zh-CN" altLang="en-US"/>
+        </a:p>
+      </dgm:t>
     </dgm:pt>
     <dgm:pt modelId="{3B0A5EC3-8A38-400E-BB8D-A070A40D3268}" type="pres">
       <dgm:prSet presAssocID="{B82FA46C-1A00-4114-AE6C-FC984C3B82D3}" presName="sibTransNodeCircle" presStyleLbl="alignNode1" presStyleIdx="4" presStyleCnt="6">
@@ -6704,6 +6879,13 @@
         </dgm:presLayoutVars>
       </dgm:prSet>
       <dgm:spPr/>
+      <dgm:t>
+        <a:bodyPr/>
+        <a:lstStyle/>
+        <a:p>
+          <a:endParaRPr lang="zh-CN" altLang="en-US"/>
+        </a:p>
+      </dgm:t>
     </dgm:pt>
     <dgm:pt modelId="{1427BD87-BA1E-4D68-B67A-9900B485F33C}" type="pres">
       <dgm:prSet presAssocID="{A766B676-93F1-40ED-84D0-3915D1D20D2C}" presName="bottomLine" presStyleLbl="alignNode1" presStyleIdx="5" presStyleCnt="6">
@@ -6718,22 +6900,29 @@
         </dgm:presLayoutVars>
       </dgm:prSet>
       <dgm:spPr/>
+      <dgm:t>
+        <a:bodyPr/>
+        <a:lstStyle/>
+        <a:p>
+          <a:endParaRPr lang="zh-CN" altLang="en-US"/>
+        </a:p>
+      </dgm:t>
     </dgm:pt>
   </dgm:ptLst>
   <dgm:cxnLst>
+    <dgm:cxn modelId="{577C40D5-ECC8-49EB-9B99-ADA09AFF276E}" srcId="{DAEC1D74-A018-4093-AD21-913B4CEA5F38}" destId="{D7BC4027-08A6-47EB-8ECA-1C7BA072A71C}" srcOrd="1" destOrd="0" parTransId="{7A7640BF-150C-4764-9D17-E2D0ACCEE148}" sibTransId="{D6BEEE7C-4F06-4C75-B0FD-BC998B761B7B}"/>
     <dgm:cxn modelId="{F5C7ED01-7606-41ED-AE4A-C943493F3D6D}" type="presOf" srcId="{D7BC4027-08A6-47EB-8ECA-1C7BA072A71C}" destId="{C770CD54-12A2-4DA7-9974-648D8153703A}" srcOrd="1" destOrd="0" presId="urn:microsoft.com/office/officeart/2016/7/layout/BasicLinearProcessNumbered"/>
+    <dgm:cxn modelId="{FB315EC2-B6DF-4169-9E8B-EAAF1E0A2243}" type="presOf" srcId="{0F2DA911-8E33-4259-B325-6E4A10F126D3}" destId="{03F7B71E-174D-42C5-8FE9-81BB8A10B66C}" srcOrd="1" destOrd="0" presId="urn:microsoft.com/office/officeart/2016/7/layout/BasicLinearProcessNumbered"/>
+    <dgm:cxn modelId="{502C0369-C2A2-4190-86DD-1D0FE5747B20}" type="presOf" srcId="{59C83618-1207-40E0-ADE0-FD8F92233051}" destId="{AD253F57-FFA0-4C6D-BF84-AE4FD9F326FA}" srcOrd="0" destOrd="0" presId="urn:microsoft.com/office/officeart/2016/7/layout/BasicLinearProcessNumbered"/>
     <dgm:cxn modelId="{579F710A-304D-40F0-985F-EE4446D31188}" type="presOf" srcId="{A766B676-93F1-40ED-84D0-3915D1D20D2C}" destId="{8F931957-55EB-4933-9B79-47C477407CC9}" srcOrd="0" destOrd="0" presId="urn:microsoft.com/office/officeart/2016/7/layout/BasicLinearProcessNumbered"/>
     <dgm:cxn modelId="{1FC8D01A-9205-4D82-85E7-A95295CE060C}" srcId="{DAEC1D74-A018-4093-AD21-913B4CEA5F38}" destId="{A766B676-93F1-40ED-84D0-3915D1D20D2C}" srcOrd="2" destOrd="0" parTransId="{781F67A9-6B1B-4F74-AFAD-D6E70C49AD70}" sibTransId="{B82FA46C-1A00-4114-AE6C-FC984C3B82D3}"/>
-    <dgm:cxn modelId="{502C0369-C2A2-4190-86DD-1D0FE5747B20}" type="presOf" srcId="{59C83618-1207-40E0-ADE0-FD8F92233051}" destId="{AD253F57-FFA0-4C6D-BF84-AE4FD9F326FA}" srcOrd="0" destOrd="0" presId="urn:microsoft.com/office/officeart/2016/7/layout/BasicLinearProcessNumbered"/>
+    <dgm:cxn modelId="{96B3A2FA-9EF0-4255-AE8C-D63AB978D88D}" type="presOf" srcId="{A766B676-93F1-40ED-84D0-3915D1D20D2C}" destId="{90069D27-F6B6-406F-8BDD-A126814A7F7E}" srcOrd="1" destOrd="0" presId="urn:microsoft.com/office/officeart/2016/7/layout/BasicLinearProcessNumbered"/>
     <dgm:cxn modelId="{08305D6C-93B5-4503-8A75-373D009A29A6}" type="presOf" srcId="{D6BEEE7C-4F06-4C75-B0FD-BC998B761B7B}" destId="{DB049BFF-BB21-47C5-B9AE-EDCF88EE83C1}" srcOrd="0" destOrd="0" presId="urn:microsoft.com/office/officeart/2016/7/layout/BasicLinearProcessNumbered"/>
+    <dgm:cxn modelId="{32D85FEB-1693-426F-A357-1C8C16B89977}" type="presOf" srcId="{D7BC4027-08A6-47EB-8ECA-1C7BA072A71C}" destId="{2E44CF34-F98F-454B-B1FE-92DD3A1C239B}" srcOrd="0" destOrd="0" presId="urn:microsoft.com/office/officeart/2016/7/layout/BasicLinearProcessNumbered"/>
+    <dgm:cxn modelId="{C7FF2CC1-6C08-401A-A2C7-E3C9DEE5808C}" type="presOf" srcId="{B82FA46C-1A00-4114-AE6C-FC984C3B82D3}" destId="{3B0A5EC3-8A38-400E-BB8D-A070A40D3268}" srcOrd="0" destOrd="0" presId="urn:microsoft.com/office/officeart/2016/7/layout/BasicLinearProcessNumbered"/>
     <dgm:cxn modelId="{253E027A-C57B-4E04-8B5A-341401635BB2}" srcId="{DAEC1D74-A018-4093-AD21-913B4CEA5F38}" destId="{0F2DA911-8E33-4259-B325-6E4A10F126D3}" srcOrd="0" destOrd="0" parTransId="{1DA7F2E3-5967-4A89-ADB2-C06F409E3702}" sibTransId="{59C83618-1207-40E0-ADE0-FD8F92233051}"/>
     <dgm:cxn modelId="{3B46B6B3-1C15-4124-8867-A1A25FED467C}" type="presOf" srcId="{0F2DA911-8E33-4259-B325-6E4A10F126D3}" destId="{0A2BC4C9-EA61-4A11-BF75-CFD5956C27E1}" srcOrd="0" destOrd="0" presId="urn:microsoft.com/office/officeart/2016/7/layout/BasicLinearProcessNumbered"/>
-    <dgm:cxn modelId="{C7FF2CC1-6C08-401A-A2C7-E3C9DEE5808C}" type="presOf" srcId="{B82FA46C-1A00-4114-AE6C-FC984C3B82D3}" destId="{3B0A5EC3-8A38-400E-BB8D-A070A40D3268}" srcOrd="0" destOrd="0" presId="urn:microsoft.com/office/officeart/2016/7/layout/BasicLinearProcessNumbered"/>
-    <dgm:cxn modelId="{FB315EC2-B6DF-4169-9E8B-EAAF1E0A2243}" type="presOf" srcId="{0F2DA911-8E33-4259-B325-6E4A10F126D3}" destId="{03F7B71E-174D-42C5-8FE9-81BB8A10B66C}" srcOrd="1" destOrd="0" presId="urn:microsoft.com/office/officeart/2016/7/layout/BasicLinearProcessNumbered"/>
     <dgm:cxn modelId="{509582C2-0805-4D3F-87BF-DBC163BC7877}" type="presOf" srcId="{DAEC1D74-A018-4093-AD21-913B4CEA5F38}" destId="{ED5005F3-716B-4E05-B00D-7A3148181288}" srcOrd="0" destOrd="0" presId="urn:microsoft.com/office/officeart/2016/7/layout/BasicLinearProcessNumbered"/>
-    <dgm:cxn modelId="{577C40D5-ECC8-49EB-9B99-ADA09AFF276E}" srcId="{DAEC1D74-A018-4093-AD21-913B4CEA5F38}" destId="{D7BC4027-08A6-47EB-8ECA-1C7BA072A71C}" srcOrd="1" destOrd="0" parTransId="{7A7640BF-150C-4764-9D17-E2D0ACCEE148}" sibTransId="{D6BEEE7C-4F06-4C75-B0FD-BC998B761B7B}"/>
-    <dgm:cxn modelId="{32D85FEB-1693-426F-A357-1C8C16B89977}" type="presOf" srcId="{D7BC4027-08A6-47EB-8ECA-1C7BA072A71C}" destId="{2E44CF34-F98F-454B-B1FE-92DD3A1C239B}" srcOrd="0" destOrd="0" presId="urn:microsoft.com/office/officeart/2016/7/layout/BasicLinearProcessNumbered"/>
-    <dgm:cxn modelId="{96B3A2FA-9EF0-4255-AE8C-D63AB978D88D}" type="presOf" srcId="{A766B676-93F1-40ED-84D0-3915D1D20D2C}" destId="{90069D27-F6B6-406F-8BDD-A126814A7F7E}" srcOrd="1" destOrd="0" presId="urn:microsoft.com/office/officeart/2016/7/layout/BasicLinearProcessNumbered"/>
     <dgm:cxn modelId="{1464A3B0-45B2-49A2-977D-C51D9B741A41}" type="presParOf" srcId="{ED5005F3-716B-4E05-B00D-7A3148181288}" destId="{640B4CD6-3794-40CE-AE35-24ABF7A85C3C}" srcOrd="0" destOrd="0" presId="urn:microsoft.com/office/officeart/2016/7/layout/BasicLinearProcessNumbered"/>
     <dgm:cxn modelId="{3A60A599-E410-4E68-A21D-6BD6A11452EB}" type="presParOf" srcId="{640B4CD6-3794-40CE-AE35-24ABF7A85C3C}" destId="{0A2BC4C9-EA61-4A11-BF75-CFD5956C27E1}" srcOrd="0" destOrd="0" presId="urn:microsoft.com/office/officeart/2016/7/layout/BasicLinearProcessNumbered"/>
     <dgm:cxn modelId="{F0B246D7-5763-48A8-9EAC-DE5A117C9F16}" type="presParOf" srcId="{640B4CD6-3794-40CE-AE35-24ABF7A85C3C}" destId="{AD253F57-FFA0-4C6D-BF84-AE4FD9F326FA}" srcOrd="1" destOrd="0" presId="urn:microsoft.com/office/officeart/2016/7/layout/BasicLinearProcessNumbered"/>
@@ -6859,6 +7048,13 @@
         </dgm:presLayoutVars>
       </dgm:prSet>
       <dgm:spPr/>
+      <dgm:t>
+        <a:bodyPr/>
+        <a:lstStyle/>
+        <a:p>
+          <a:endParaRPr lang="zh-CN" altLang="en-US"/>
+        </a:p>
+      </dgm:t>
     </dgm:pt>
     <dgm:pt modelId="{61AAE50C-98B9-4EE5-A5FB-1DFBDC97527E}" type="pres">
       <dgm:prSet presAssocID="{DA5B726F-BF94-4B08-8F96-483AD40703C8}" presName="thickLine" presStyleLbl="alignNode1" presStyleIdx="0" presStyleCnt="2"/>
@@ -6871,6 +7067,13 @@
     <dgm:pt modelId="{68D1F56D-6D90-4B06-B5E2-A54EEF8737DC}" type="pres">
       <dgm:prSet presAssocID="{DA5B726F-BF94-4B08-8F96-483AD40703C8}" presName="tx1" presStyleLbl="revTx" presStyleIdx="0" presStyleCnt="2"/>
       <dgm:spPr/>
+      <dgm:t>
+        <a:bodyPr/>
+        <a:lstStyle/>
+        <a:p>
+          <a:endParaRPr lang="zh-CN" altLang="en-US"/>
+        </a:p>
+      </dgm:t>
     </dgm:pt>
     <dgm:pt modelId="{49FD96DE-05F8-46CC-AA9B-BD5BA53A6EAA}" type="pres">
       <dgm:prSet presAssocID="{DA5B726F-BF94-4B08-8F96-483AD40703C8}" presName="vert1" presStyleCnt="0"/>
@@ -6887,6 +7090,13 @@
     <dgm:pt modelId="{21FC0A34-CA54-46A8-9F2C-D465A9D9C7AE}" type="pres">
       <dgm:prSet presAssocID="{AAC85C27-8838-476D-894C-A9C65D2C89EA}" presName="tx1" presStyleLbl="revTx" presStyleIdx="1" presStyleCnt="2"/>
       <dgm:spPr/>
+      <dgm:t>
+        <a:bodyPr/>
+        <a:lstStyle/>
+        <a:p>
+          <a:endParaRPr lang="zh-CN" altLang="en-US"/>
+        </a:p>
+      </dgm:t>
     </dgm:pt>
     <dgm:pt modelId="{E52AF03A-4B68-475E-9219-0FDB8F0F4BBB}" type="pres">
       <dgm:prSet presAssocID="{AAC85C27-8838-476D-894C-A9C65D2C89EA}" presName="vert1" presStyleCnt="0"/>
@@ -6894,11 +7104,11 @@
     </dgm:pt>
   </dgm:ptLst>
   <dgm:cxnLst>
-    <dgm:cxn modelId="{DFCB5E25-130C-4463-A573-7B4B4163E591}" type="presOf" srcId="{AAC85C27-8838-476D-894C-A9C65D2C89EA}" destId="{21FC0A34-CA54-46A8-9F2C-D465A9D9C7AE}" srcOrd="0" destOrd="0" presId="urn:microsoft.com/office/officeart/2008/layout/LinedList"/>
-    <dgm:cxn modelId="{A6F1CF79-060A-449C-945A-C349AF2C2211}" type="presOf" srcId="{DA5B726F-BF94-4B08-8F96-483AD40703C8}" destId="{68D1F56D-6D90-4B06-B5E2-A54EEF8737DC}" srcOrd="0" destOrd="0" presId="urn:microsoft.com/office/officeart/2008/layout/LinedList"/>
     <dgm:cxn modelId="{12B7CEB9-E3B6-4C63-91AE-D192A1D408B0}" type="presOf" srcId="{729C2E20-D3AD-47F4-90FB-061F52CB181D}" destId="{A2583710-BB73-4CC6-83A5-CF78897EC484}" srcOrd="0" destOrd="0" presId="urn:microsoft.com/office/officeart/2008/layout/LinedList"/>
     <dgm:cxn modelId="{67E7EECE-3FC2-4829-ADAC-165ECA448958}" srcId="{729C2E20-D3AD-47F4-90FB-061F52CB181D}" destId="{DA5B726F-BF94-4B08-8F96-483AD40703C8}" srcOrd="0" destOrd="0" parTransId="{1D68FB95-40ED-45A2-8166-C5D4997DECD6}" sibTransId="{B5B73E2A-3EE6-478E-83C0-EB20943A2FE1}"/>
+    <dgm:cxn modelId="{A6F1CF79-060A-449C-945A-C349AF2C2211}" type="presOf" srcId="{DA5B726F-BF94-4B08-8F96-483AD40703C8}" destId="{68D1F56D-6D90-4B06-B5E2-A54EEF8737DC}" srcOrd="0" destOrd="0" presId="urn:microsoft.com/office/officeart/2008/layout/LinedList"/>
     <dgm:cxn modelId="{D92BEBDE-D0F4-4542-BA11-981B36E31002}" srcId="{729C2E20-D3AD-47F4-90FB-061F52CB181D}" destId="{AAC85C27-8838-476D-894C-A9C65D2C89EA}" srcOrd="1" destOrd="0" parTransId="{31C9BC34-03C6-47FC-A618-DE686FD681A0}" sibTransId="{65C1C38A-157C-4E2F-9AD1-15673B5476EA}"/>
+    <dgm:cxn modelId="{DFCB5E25-130C-4463-A573-7B4B4163E591}" type="presOf" srcId="{AAC85C27-8838-476D-894C-A9C65D2C89EA}" destId="{21FC0A34-CA54-46A8-9F2C-D465A9D9C7AE}" srcOrd="0" destOrd="0" presId="urn:microsoft.com/office/officeart/2008/layout/LinedList"/>
     <dgm:cxn modelId="{64734887-5D3F-440F-BF64-8F1ACA007738}" type="presParOf" srcId="{A2583710-BB73-4CC6-83A5-CF78897EC484}" destId="{61AAE50C-98B9-4EE5-A5FB-1DFBDC97527E}" srcOrd="0" destOrd="0" presId="urn:microsoft.com/office/officeart/2008/layout/LinedList"/>
     <dgm:cxn modelId="{FACD9B26-F6B1-4B38-B171-166B1CC2158A}" type="presParOf" srcId="{A2583710-BB73-4CC6-83A5-CF78897EC484}" destId="{A637C862-A247-4249-B106-6BAA26A023D6}" srcOrd="1" destOrd="0" presId="urn:microsoft.com/office/officeart/2008/layout/LinedList"/>
     <dgm:cxn modelId="{0D319804-7269-4619-A1DA-A0E7ECF2C116}" type="presParOf" srcId="{A637C862-A247-4249-B106-6BAA26A023D6}" destId="{68D1F56D-6D90-4B06-B5E2-A54EEF8737DC}" srcOrd="0" destOrd="0" presId="urn:microsoft.com/office/officeart/2008/layout/LinedList"/>
@@ -7132,6 +7342,13 @@
         </dgm:presLayoutVars>
       </dgm:prSet>
       <dgm:spPr/>
+      <dgm:t>
+        <a:bodyPr/>
+        <a:lstStyle/>
+        <a:p>
+          <a:endParaRPr lang="zh-CN" altLang="en-US"/>
+        </a:p>
+      </dgm:t>
     </dgm:pt>
     <dgm:pt modelId="{A221F936-C32C-4F85-B795-75C120986B23}" type="pres">
       <dgm:prSet presAssocID="{A8BE67B1-F28C-4E36-B8DD-FBFA6DA83C9A}" presName="compositeNode" presStyleCnt="0">
@@ -7144,6 +7361,13 @@
     <dgm:pt modelId="{7B84E711-C213-4091-A31C-60FEED582B0E}" type="pres">
       <dgm:prSet presAssocID="{A8BE67B1-F28C-4E36-B8DD-FBFA6DA83C9A}" presName="bgRect" presStyleLbl="bgAccFollowNode1" presStyleIdx="0" presStyleCnt="3"/>
       <dgm:spPr/>
+      <dgm:t>
+        <a:bodyPr/>
+        <a:lstStyle/>
+        <a:p>
+          <a:endParaRPr lang="zh-CN" altLang="en-US"/>
+        </a:p>
+      </dgm:t>
     </dgm:pt>
     <dgm:pt modelId="{E54DBF68-14FF-4198-8974-5317ACA5E072}" type="pres">
       <dgm:prSet presAssocID="{7EA461BB-35F1-483D-92A2-1599148B9DF2}" presName="sibTransNodeCircle" presStyleLbl="alignNode1" presStyleIdx="0" presStyleCnt="6">
@@ -7153,6 +7377,13 @@
         </dgm:presLayoutVars>
       </dgm:prSet>
       <dgm:spPr/>
+      <dgm:t>
+        <a:bodyPr/>
+        <a:lstStyle/>
+        <a:p>
+          <a:endParaRPr lang="zh-CN" altLang="en-US"/>
+        </a:p>
+      </dgm:t>
     </dgm:pt>
     <dgm:pt modelId="{8A61FE34-3545-4031-9622-D4F5ABC779F0}" type="pres">
       <dgm:prSet presAssocID="{A8BE67B1-F28C-4E36-B8DD-FBFA6DA83C9A}" presName="bottomLine" presStyleLbl="alignNode1" presStyleIdx="1" presStyleCnt="6">
@@ -7167,6 +7398,13 @@
         </dgm:presLayoutVars>
       </dgm:prSet>
       <dgm:spPr/>
+      <dgm:t>
+        <a:bodyPr/>
+        <a:lstStyle/>
+        <a:p>
+          <a:endParaRPr lang="zh-CN" altLang="en-US"/>
+        </a:p>
+      </dgm:t>
     </dgm:pt>
     <dgm:pt modelId="{559F2F75-2F40-4982-B23E-858C9500AA1C}" type="pres">
       <dgm:prSet presAssocID="{7EA461BB-35F1-483D-92A2-1599148B9DF2}" presName="sibTrans" presStyleCnt="0"/>
@@ -7183,6 +7421,13 @@
     <dgm:pt modelId="{16C8E97E-93FC-4B6A-BA37-4CB5B88A2D69}" type="pres">
       <dgm:prSet presAssocID="{0C9C10EE-65A8-411F-94D5-CC6B6FC82D9C}" presName="bgRect" presStyleLbl="bgAccFollowNode1" presStyleIdx="1" presStyleCnt="3"/>
       <dgm:spPr/>
+      <dgm:t>
+        <a:bodyPr/>
+        <a:lstStyle/>
+        <a:p>
+          <a:endParaRPr lang="zh-CN" altLang="en-US"/>
+        </a:p>
+      </dgm:t>
     </dgm:pt>
     <dgm:pt modelId="{3981E709-FF4D-46FA-966B-69C49CBC72B9}" type="pres">
       <dgm:prSet presAssocID="{C8F322B6-D42B-4F59-B29A-5B1033DE585F}" presName="sibTransNodeCircle" presStyleLbl="alignNode1" presStyleIdx="2" presStyleCnt="6">
@@ -7192,6 +7437,13 @@
         </dgm:presLayoutVars>
       </dgm:prSet>
       <dgm:spPr/>
+      <dgm:t>
+        <a:bodyPr/>
+        <a:lstStyle/>
+        <a:p>
+          <a:endParaRPr lang="zh-CN" altLang="en-US"/>
+        </a:p>
+      </dgm:t>
     </dgm:pt>
     <dgm:pt modelId="{F045513A-E9DC-4251-9AE7-2384FBB0626A}" type="pres">
       <dgm:prSet presAssocID="{0C9C10EE-65A8-411F-94D5-CC6B6FC82D9C}" presName="bottomLine" presStyleLbl="alignNode1" presStyleIdx="3" presStyleCnt="6">
@@ -7206,6 +7458,13 @@
         </dgm:presLayoutVars>
       </dgm:prSet>
       <dgm:spPr/>
+      <dgm:t>
+        <a:bodyPr/>
+        <a:lstStyle/>
+        <a:p>
+          <a:endParaRPr lang="zh-CN" altLang="en-US"/>
+        </a:p>
+      </dgm:t>
     </dgm:pt>
     <dgm:pt modelId="{692DC0FB-C675-44B5-A01E-A0B41762BA75}" type="pres">
       <dgm:prSet presAssocID="{C8F322B6-D42B-4F59-B29A-5B1033DE585F}" presName="sibTrans" presStyleCnt="0"/>
@@ -7222,6 +7481,13 @@
     <dgm:pt modelId="{70F59C85-8C2A-4C8D-A836-EB95F5DF7DF7}" type="pres">
       <dgm:prSet presAssocID="{A094A5E8-F9C2-4DE0-A4B9-1686A6AB2176}" presName="bgRect" presStyleLbl="bgAccFollowNode1" presStyleIdx="2" presStyleCnt="3"/>
       <dgm:spPr/>
+      <dgm:t>
+        <a:bodyPr/>
+        <a:lstStyle/>
+        <a:p>
+          <a:endParaRPr lang="zh-CN" altLang="en-US"/>
+        </a:p>
+      </dgm:t>
     </dgm:pt>
     <dgm:pt modelId="{ACC55A22-1A5A-49EA-BB6F-5212D9D5CE68}" type="pres">
       <dgm:prSet presAssocID="{0B009104-F912-46F3-BED6-35ACED3EEDB2}" presName="sibTransNodeCircle" presStyleLbl="alignNode1" presStyleIdx="4" presStyleCnt="6">
@@ -7231,6 +7497,13 @@
         </dgm:presLayoutVars>
       </dgm:prSet>
       <dgm:spPr/>
+      <dgm:t>
+        <a:bodyPr/>
+        <a:lstStyle/>
+        <a:p>
+          <a:endParaRPr lang="zh-CN" altLang="en-US"/>
+        </a:p>
+      </dgm:t>
     </dgm:pt>
     <dgm:pt modelId="{751147A1-ECEB-461F-B4EE-64AB9AD2DDC9}" type="pres">
       <dgm:prSet presAssocID="{A094A5E8-F9C2-4DE0-A4B9-1686A6AB2176}" presName="bottomLine" presStyleLbl="alignNode1" presStyleIdx="5" presStyleCnt="6">
@@ -7245,22 +7518,29 @@
         </dgm:presLayoutVars>
       </dgm:prSet>
       <dgm:spPr/>
+      <dgm:t>
+        <a:bodyPr/>
+        <a:lstStyle/>
+        <a:p>
+          <a:endParaRPr lang="zh-CN" altLang="en-US"/>
+        </a:p>
+      </dgm:t>
     </dgm:pt>
   </dgm:ptLst>
   <dgm:cxnLst>
-    <dgm:cxn modelId="{4C913422-BDC3-474D-890F-30EAD428EF52}" srcId="{D77FD568-8C2E-4ACE-937E-1B189F0C6C48}" destId="{A8BE67B1-F28C-4E36-B8DD-FBFA6DA83C9A}" srcOrd="0" destOrd="0" parTransId="{02109551-469A-4C2F-A9A8-D798E973AA23}" sibTransId="{7EA461BB-35F1-483D-92A2-1599148B9DF2}"/>
+    <dgm:cxn modelId="{1EA515B6-4C6C-489A-901A-95346CEF6F26}" srcId="{D77FD568-8C2E-4ACE-937E-1B189F0C6C48}" destId="{0C9C10EE-65A8-411F-94D5-CC6B6FC82D9C}" srcOrd="1" destOrd="0" parTransId="{095A18E2-B4FE-4887-B797-9BA638DDF57D}" sibTransId="{C8F322B6-D42B-4F59-B29A-5B1033DE585F}"/>
     <dgm:cxn modelId="{0E89802C-7CA5-47DA-8324-25F0837B6AAE}" type="presOf" srcId="{A094A5E8-F9C2-4DE0-A4B9-1686A6AB2176}" destId="{70F59C85-8C2A-4C8D-A836-EB95F5DF7DF7}" srcOrd="0" destOrd="0" presId="urn:microsoft.com/office/officeart/2016/7/layout/BasicLinearProcessNumbered"/>
+    <dgm:cxn modelId="{8C327F42-9229-4B36-AE29-080BB03C88F9}" type="presOf" srcId="{A094A5E8-F9C2-4DE0-A4B9-1686A6AB2176}" destId="{BC100725-0A23-4A17-9772-7F1466D58BD7}" srcOrd="1" destOrd="0" presId="urn:microsoft.com/office/officeart/2016/7/layout/BasicLinearProcessNumbered"/>
+    <dgm:cxn modelId="{F160463D-5D69-4BB7-89D1-6E329AB9748E}" type="presOf" srcId="{D77FD568-8C2E-4ACE-937E-1B189F0C6C48}" destId="{0A0AF22F-3923-481C-B541-C3011504CCD8}" srcOrd="0" destOrd="0" presId="urn:microsoft.com/office/officeart/2016/7/layout/BasicLinearProcessNumbered"/>
     <dgm:cxn modelId="{DEFB3D2D-F0C3-49F9-AF8B-9F1F4E7A1B44}" srcId="{D77FD568-8C2E-4ACE-937E-1B189F0C6C48}" destId="{A094A5E8-F9C2-4DE0-A4B9-1686A6AB2176}" srcOrd="2" destOrd="0" parTransId="{3AF6217C-C19B-4758-A1A9-B7E5EF932589}" sibTransId="{0B009104-F912-46F3-BED6-35ACED3EEDB2}"/>
-    <dgm:cxn modelId="{1BEA4B32-0A00-42F0-B08E-A1BF95C7E697}" type="presOf" srcId="{A8BE67B1-F28C-4E36-B8DD-FBFA6DA83C9A}" destId="{7B84E711-C213-4091-A31C-60FEED582B0E}" srcOrd="0" destOrd="0" presId="urn:microsoft.com/office/officeart/2016/7/layout/BasicLinearProcessNumbered"/>
-    <dgm:cxn modelId="{F160463D-5D69-4BB7-89D1-6E329AB9748E}" type="presOf" srcId="{D77FD568-8C2E-4ACE-937E-1B189F0C6C48}" destId="{0A0AF22F-3923-481C-B541-C3011504CCD8}" srcOrd="0" destOrd="0" presId="urn:microsoft.com/office/officeart/2016/7/layout/BasicLinearProcessNumbered"/>
-    <dgm:cxn modelId="{8C327F42-9229-4B36-AE29-080BB03C88F9}" type="presOf" srcId="{A094A5E8-F9C2-4DE0-A4B9-1686A6AB2176}" destId="{BC100725-0A23-4A17-9772-7F1466D58BD7}" srcOrd="1" destOrd="0" presId="urn:microsoft.com/office/officeart/2016/7/layout/BasicLinearProcessNumbered"/>
     <dgm:cxn modelId="{E86A4072-9CF6-48E2-965D-A7A60010A2B8}" type="presOf" srcId="{C8F322B6-D42B-4F59-B29A-5B1033DE585F}" destId="{3981E709-FF4D-46FA-966B-69C49CBC72B9}" srcOrd="0" destOrd="0" presId="urn:microsoft.com/office/officeart/2016/7/layout/BasicLinearProcessNumbered"/>
     <dgm:cxn modelId="{96B09376-65F3-4664-AC25-0E5EC87E2995}" type="presOf" srcId="{0C9C10EE-65A8-411F-94D5-CC6B6FC82D9C}" destId="{FD0B570F-74BB-42C0-A211-D1C3B3B44D15}" srcOrd="1" destOrd="0" presId="urn:microsoft.com/office/officeart/2016/7/layout/BasicLinearProcessNumbered"/>
-    <dgm:cxn modelId="{1EA515B6-4C6C-489A-901A-95346CEF6F26}" srcId="{D77FD568-8C2E-4ACE-937E-1B189F0C6C48}" destId="{0C9C10EE-65A8-411F-94D5-CC6B6FC82D9C}" srcOrd="1" destOrd="0" parTransId="{095A18E2-B4FE-4887-B797-9BA638DDF57D}" sibTransId="{C8F322B6-D42B-4F59-B29A-5B1033DE585F}"/>
     <dgm:cxn modelId="{25860CBB-BD41-4701-AB29-B6BBFF58CCF5}" type="presOf" srcId="{A8BE67B1-F28C-4E36-B8DD-FBFA6DA83C9A}" destId="{CD7971E5-7A87-463B-999B-DFC1AB5E88DC}" srcOrd="1" destOrd="0" presId="urn:microsoft.com/office/officeart/2016/7/layout/BasicLinearProcessNumbered"/>
+    <dgm:cxn modelId="{1BEA4B32-0A00-42F0-B08E-A1BF95C7E697}" type="presOf" srcId="{A8BE67B1-F28C-4E36-B8DD-FBFA6DA83C9A}" destId="{7B84E711-C213-4091-A31C-60FEED582B0E}" srcOrd="0" destOrd="0" presId="urn:microsoft.com/office/officeart/2016/7/layout/BasicLinearProcessNumbered"/>
+    <dgm:cxn modelId="{ED049CC9-30AD-4170-8C91-D0B6F6F6065B}" type="presOf" srcId="{0B009104-F912-46F3-BED6-35ACED3EEDB2}" destId="{ACC55A22-1A5A-49EA-BB6F-5212D9D5CE68}" srcOrd="0" destOrd="0" presId="urn:microsoft.com/office/officeart/2016/7/layout/BasicLinearProcessNumbered"/>
+    <dgm:cxn modelId="{4C913422-BDC3-474D-890F-30EAD428EF52}" srcId="{D77FD568-8C2E-4ACE-937E-1B189F0C6C48}" destId="{A8BE67B1-F28C-4E36-B8DD-FBFA6DA83C9A}" srcOrd="0" destOrd="0" parTransId="{02109551-469A-4C2F-A9A8-D798E973AA23}" sibTransId="{7EA461BB-35F1-483D-92A2-1599148B9DF2}"/>
+    <dgm:cxn modelId="{E7750FED-A92B-4323-8B87-5A9AA5488F44}" type="presOf" srcId="{7EA461BB-35F1-483D-92A2-1599148B9DF2}" destId="{E54DBF68-14FF-4198-8974-5317ACA5E072}" srcOrd="0" destOrd="0" presId="urn:microsoft.com/office/officeart/2016/7/layout/BasicLinearProcessNumbered"/>
     <dgm:cxn modelId="{18A626C5-8161-4B8F-9518-8B111C4EAA07}" type="presOf" srcId="{0C9C10EE-65A8-411F-94D5-CC6B6FC82D9C}" destId="{16C8E97E-93FC-4B6A-BA37-4CB5B88A2D69}" srcOrd="0" destOrd="0" presId="urn:microsoft.com/office/officeart/2016/7/layout/BasicLinearProcessNumbered"/>
-    <dgm:cxn modelId="{ED049CC9-30AD-4170-8C91-D0B6F6F6065B}" type="presOf" srcId="{0B009104-F912-46F3-BED6-35ACED3EEDB2}" destId="{ACC55A22-1A5A-49EA-BB6F-5212D9D5CE68}" srcOrd="0" destOrd="0" presId="urn:microsoft.com/office/officeart/2016/7/layout/BasicLinearProcessNumbered"/>
-    <dgm:cxn modelId="{E7750FED-A92B-4323-8B87-5A9AA5488F44}" type="presOf" srcId="{7EA461BB-35F1-483D-92A2-1599148B9DF2}" destId="{E54DBF68-14FF-4198-8974-5317ACA5E072}" srcOrd="0" destOrd="0" presId="urn:microsoft.com/office/officeart/2016/7/layout/BasicLinearProcessNumbered"/>
     <dgm:cxn modelId="{F0EC0D4A-7DC9-4196-BA46-8762A266CC71}" type="presParOf" srcId="{0A0AF22F-3923-481C-B541-C3011504CCD8}" destId="{A221F936-C32C-4F85-B795-75C120986B23}" srcOrd="0" destOrd="0" presId="urn:microsoft.com/office/officeart/2016/7/layout/BasicLinearProcessNumbered"/>
     <dgm:cxn modelId="{03F0A559-4971-439F-89DF-F062BD0D363D}" type="presParOf" srcId="{A221F936-C32C-4F85-B795-75C120986B23}" destId="{7B84E711-C213-4091-A31C-60FEED582B0E}" srcOrd="0" destOrd="0" presId="urn:microsoft.com/office/officeart/2016/7/layout/BasicLinearProcessNumbered"/>
     <dgm:cxn modelId="{0C38AE75-191D-4E88-B44D-97D336107BAE}" type="presParOf" srcId="{A221F936-C32C-4F85-B795-75C120986B23}" destId="{E54DBF68-14FF-4198-8974-5317ACA5E072}" srcOrd="1" destOrd="0" presId="urn:microsoft.com/office/officeart/2016/7/layout/BasicLinearProcessNumbered"/>
@@ -7487,6 +7767,13 @@
         </dgm:presLayoutVars>
       </dgm:prSet>
       <dgm:spPr/>
+      <dgm:t>
+        <a:bodyPr/>
+        <a:lstStyle/>
+        <a:p>
+          <a:endParaRPr lang="zh-CN" altLang="en-US"/>
+        </a:p>
+      </dgm:t>
     </dgm:pt>
     <dgm:pt modelId="{F680AE2F-67C4-49F0-90C2-114171B5326F}" type="pres">
       <dgm:prSet presAssocID="{236F6443-8A11-4608-BDE5-834CFEAC03E9}" presName="thickLine" presStyleLbl="alignNode1" presStyleIdx="0" presStyleCnt="3"/>
@@ -7499,6 +7786,13 @@
     <dgm:pt modelId="{4CCE1962-CFD0-4909-8091-07AA1077E5B2}" type="pres">
       <dgm:prSet presAssocID="{236F6443-8A11-4608-BDE5-834CFEAC03E9}" presName="tx1" presStyleLbl="revTx" presStyleIdx="0" presStyleCnt="3"/>
       <dgm:spPr/>
+      <dgm:t>
+        <a:bodyPr/>
+        <a:lstStyle/>
+        <a:p>
+          <a:endParaRPr lang="zh-CN" altLang="en-US"/>
+        </a:p>
+      </dgm:t>
     </dgm:pt>
     <dgm:pt modelId="{9A37C4D3-72C6-4EDC-8A10-A4E7EE3E2676}" type="pres">
       <dgm:prSet presAssocID="{236F6443-8A11-4608-BDE5-834CFEAC03E9}" presName="vert1" presStyleCnt="0"/>
@@ -7515,6 +7809,13 @@
     <dgm:pt modelId="{1F3D16B4-C2A6-4B87-9A70-24385BBBA6E9}" type="pres">
       <dgm:prSet presAssocID="{B8345757-E177-4A5D-B149-0D0279526986}" presName="tx1" presStyleLbl="revTx" presStyleIdx="1" presStyleCnt="3"/>
       <dgm:spPr/>
+      <dgm:t>
+        <a:bodyPr/>
+        <a:lstStyle/>
+        <a:p>
+          <a:endParaRPr lang="zh-CN" altLang="en-US"/>
+        </a:p>
+      </dgm:t>
     </dgm:pt>
     <dgm:pt modelId="{D5AFF4C9-F93B-48EC-8C9E-4F105AD77ECF}" type="pres">
       <dgm:prSet presAssocID="{B8345757-E177-4A5D-B149-0D0279526986}" presName="vert1" presStyleCnt="0"/>
@@ -7531,6 +7832,13 @@
     <dgm:pt modelId="{0E1CEA97-BEAE-44E5-A34A-4D6FB7981643}" type="pres">
       <dgm:prSet presAssocID="{74830266-4E21-4B05-997D-7B3B7212F9A9}" presName="tx1" presStyleLbl="revTx" presStyleIdx="2" presStyleCnt="3"/>
       <dgm:spPr/>
+      <dgm:t>
+        <a:bodyPr/>
+        <a:lstStyle/>
+        <a:p>
+          <a:endParaRPr lang="zh-CN" altLang="en-US"/>
+        </a:p>
+      </dgm:t>
     </dgm:pt>
     <dgm:pt modelId="{5073E829-5A3D-4E15-9192-7F2802416161}" type="pres">
       <dgm:prSet presAssocID="{74830266-4E21-4B05-997D-7B3B7212F9A9}" presName="vert1" presStyleCnt="0"/>
@@ -7538,13 +7846,13 @@
     </dgm:pt>
   </dgm:ptLst>
   <dgm:cxnLst>
+    <dgm:cxn modelId="{88BAB7C4-5F55-4837-9547-7042318CB8E4}" type="presOf" srcId="{DF8F85B2-1522-4988-A1D5-67069AA5D20E}" destId="{2C585B32-4B0F-4832-B1FE-4622E82DD088}" srcOrd="0" destOrd="0" presId="urn:microsoft.com/office/officeart/2008/layout/LinedList"/>
+    <dgm:cxn modelId="{7C7D19AB-6840-4C51-A731-088413B97981}" type="presOf" srcId="{B8345757-E177-4A5D-B149-0D0279526986}" destId="{1F3D16B4-C2A6-4B87-9A70-24385BBBA6E9}" srcOrd="0" destOrd="0" presId="urn:microsoft.com/office/officeart/2008/layout/LinedList"/>
     <dgm:cxn modelId="{CE25CE03-2503-4344-885F-5F9196224DD2}" srcId="{DF8F85B2-1522-4988-A1D5-67069AA5D20E}" destId="{236F6443-8A11-4608-BDE5-834CFEAC03E9}" srcOrd="0" destOrd="0" parTransId="{18951CCC-C807-4875-B5E3-A10E5889C9D8}" sibTransId="{DE0141A5-A29D-4BF8-8BBA-43FCCBDB96F5}"/>
+    <dgm:cxn modelId="{66E8FE53-7F7A-4166-BE44-63A2B0029444}" srcId="{DF8F85B2-1522-4988-A1D5-67069AA5D20E}" destId="{B8345757-E177-4A5D-B149-0D0279526986}" srcOrd="1" destOrd="0" parTransId="{C774339D-6B68-41AB-86E2-229AFC9FBC17}" sibTransId="{F281F9BE-F470-4D7D-A319-132F04093FA7}"/>
+    <dgm:cxn modelId="{85947FC8-1A98-4509-B634-6B0E9C7CEC64}" type="presOf" srcId="{74830266-4E21-4B05-997D-7B3B7212F9A9}" destId="{0E1CEA97-BEAE-44E5-A34A-4D6FB7981643}" srcOrd="0" destOrd="0" presId="urn:microsoft.com/office/officeart/2008/layout/LinedList"/>
     <dgm:cxn modelId="{7B343132-77AA-429D-ACD3-B2B301F7FA27}" type="presOf" srcId="{236F6443-8A11-4608-BDE5-834CFEAC03E9}" destId="{4CCE1962-CFD0-4909-8091-07AA1077E5B2}" srcOrd="0" destOrd="0" presId="urn:microsoft.com/office/officeart/2008/layout/LinedList"/>
     <dgm:cxn modelId="{70C74138-5E42-472C-AA92-15DDDB8078B5}" srcId="{DF8F85B2-1522-4988-A1D5-67069AA5D20E}" destId="{74830266-4E21-4B05-997D-7B3B7212F9A9}" srcOrd="2" destOrd="0" parTransId="{7A757385-1C47-4AFD-81E7-2EDE655447A7}" sibTransId="{531346A3-FDE5-4FD1-8775-D658B3E3161A}"/>
-    <dgm:cxn modelId="{66E8FE53-7F7A-4166-BE44-63A2B0029444}" srcId="{DF8F85B2-1522-4988-A1D5-67069AA5D20E}" destId="{B8345757-E177-4A5D-B149-0D0279526986}" srcOrd="1" destOrd="0" parTransId="{C774339D-6B68-41AB-86E2-229AFC9FBC17}" sibTransId="{F281F9BE-F470-4D7D-A319-132F04093FA7}"/>
-    <dgm:cxn modelId="{7C7D19AB-6840-4C51-A731-088413B97981}" type="presOf" srcId="{B8345757-E177-4A5D-B149-0D0279526986}" destId="{1F3D16B4-C2A6-4B87-9A70-24385BBBA6E9}" srcOrd="0" destOrd="0" presId="urn:microsoft.com/office/officeart/2008/layout/LinedList"/>
-    <dgm:cxn modelId="{88BAB7C4-5F55-4837-9547-7042318CB8E4}" type="presOf" srcId="{DF8F85B2-1522-4988-A1D5-67069AA5D20E}" destId="{2C585B32-4B0F-4832-B1FE-4622E82DD088}" srcOrd="0" destOrd="0" presId="urn:microsoft.com/office/officeart/2008/layout/LinedList"/>
-    <dgm:cxn modelId="{85947FC8-1A98-4509-B634-6B0E9C7CEC64}" type="presOf" srcId="{74830266-4E21-4B05-997D-7B3B7212F9A9}" destId="{0E1CEA97-BEAE-44E5-A34A-4D6FB7981643}" srcOrd="0" destOrd="0" presId="urn:microsoft.com/office/officeart/2008/layout/LinedList"/>
     <dgm:cxn modelId="{46751A87-C6AE-4D76-9814-806AF2518E8D}" type="presParOf" srcId="{2C585B32-4B0F-4832-B1FE-4622E82DD088}" destId="{F680AE2F-67C4-49F0-90C2-114171B5326F}" srcOrd="0" destOrd="0" presId="urn:microsoft.com/office/officeart/2008/layout/LinedList"/>
     <dgm:cxn modelId="{F513B602-388B-484F-B71F-135EFE4B6A5D}" type="presParOf" srcId="{2C585B32-4B0F-4832-B1FE-4622E82DD088}" destId="{8CF88E88-04D1-40D7-9575-43AD782D63DF}" srcOrd="1" destOrd="0" presId="urn:microsoft.com/office/officeart/2008/layout/LinedList"/>
     <dgm:cxn modelId="{868A134F-9C7E-4017-A234-816D83CB2871}" type="presParOf" srcId="{8CF88E88-04D1-40D7-9575-43AD782D63DF}" destId="{4CCE1962-CFD0-4909-8091-07AA1077E5B2}" srcOrd="0" destOrd="0" presId="urn:microsoft.com/office/officeart/2008/layout/LinedList"/>
@@ -7663,7 +7971,7 @@
         </a:bodyPr>
         <a:lstStyle/>
         <a:p>
-          <a:pPr marL="0" lvl="0" indent="0" algn="l" defTabSz="1644650">
+          <a:pPr lvl="0" algn="l" defTabSz="1644650">
             <a:lnSpc>
               <a:spcPct val="90000"/>
             </a:lnSpc>
@@ -7673,7 +7981,6 @@
             <a:spcAft>
               <a:spcPct val="35000"/>
             </a:spcAft>
-            <a:buNone/>
           </a:pPr>
           <a:r>
             <a:rPr lang="zh-CN" sz="3700" kern="1200" dirty="0"/>
@@ -7782,7 +8089,7 @@
         </a:bodyPr>
         <a:lstStyle/>
         <a:p>
-          <a:pPr marL="0" lvl="0" indent="0" algn="l" defTabSz="1644650">
+          <a:pPr lvl="0" algn="l" defTabSz="1644650">
             <a:lnSpc>
               <a:spcPct val="90000"/>
             </a:lnSpc>
@@ -7792,7 +8099,6 @@
             <a:spcAft>
               <a:spcPct val="35000"/>
             </a:spcAft>
-            <a:buNone/>
           </a:pPr>
           <a:r>
             <a:rPr lang="zh-CN" sz="3700" kern="1200"/>
@@ -7995,7 +8301,7 @@
         </a:bodyPr>
         <a:lstStyle/>
         <a:p>
-          <a:pPr marL="0" lvl="0" indent="0" algn="ctr" defTabSz="1422400">
+          <a:pPr lvl="0" algn="ctr" defTabSz="1422400">
             <a:lnSpc>
               <a:spcPct val="90000"/>
             </a:lnSpc>
@@ -8005,7 +8311,6 @@
             <a:spcAft>
               <a:spcPct val="35000"/>
             </a:spcAft>
-            <a:buNone/>
           </a:pPr>
           <a:r>
             <a:rPr lang="zh-CN" sz="3200" kern="1200" dirty="0"/>
@@ -8074,7 +8379,7 @@
         </a:bodyPr>
         <a:lstStyle/>
         <a:p>
-          <a:pPr marL="0" lvl="0" indent="0" algn="ctr" defTabSz="1422400">
+          <a:pPr lvl="0" algn="ctr" defTabSz="1422400">
             <a:lnSpc>
               <a:spcPct val="90000"/>
             </a:lnSpc>
@@ -8084,7 +8389,6 @@
             <a:spcAft>
               <a:spcPct val="35000"/>
             </a:spcAft>
-            <a:buNone/>
           </a:pPr>
           <a:r>
             <a:rPr lang="zh-CN" sz="3200" kern="1200" dirty="0"/>
@@ -8153,7 +8457,7 @@
         </a:bodyPr>
         <a:lstStyle/>
         <a:p>
-          <a:pPr marL="0" lvl="0" indent="0" algn="ctr" defTabSz="1422400">
+          <a:pPr lvl="0" algn="ctr" defTabSz="1422400">
             <a:lnSpc>
               <a:spcPct val="90000"/>
             </a:lnSpc>
@@ -8163,7 +8467,6 @@
             <a:spcAft>
               <a:spcPct val="35000"/>
             </a:spcAft>
-            <a:buNone/>
           </a:pPr>
           <a:r>
             <a:rPr lang="zh-CN" sz="3200" kern="1200"/>
@@ -8232,7 +8535,7 @@
         </a:bodyPr>
         <a:lstStyle/>
         <a:p>
-          <a:pPr marL="0" lvl="0" indent="0" algn="ctr" defTabSz="1422400">
+          <a:pPr lvl="0" algn="ctr" defTabSz="1422400">
             <a:lnSpc>
               <a:spcPct val="90000"/>
             </a:lnSpc>
@@ -8242,7 +8545,6 @@
             <a:spcAft>
               <a:spcPct val="35000"/>
             </a:spcAft>
-            <a:buNone/>
           </a:pPr>
           <a:r>
             <a:rPr lang="zh-CN" sz="3200" kern="1200" dirty="0"/>
@@ -8376,7 +8678,7 @@
         </a:bodyPr>
         <a:lstStyle/>
         <a:p>
-          <a:pPr marL="0" lvl="0" indent="0" algn="ctr" defTabSz="2044700">
+          <a:pPr lvl="0" algn="ctr" defTabSz="2044700">
             <a:lnSpc>
               <a:spcPct val="90000"/>
             </a:lnSpc>
@@ -8386,7 +8688,6 @@
             <a:spcAft>
               <a:spcPct val="35000"/>
             </a:spcAft>
-            <a:buNone/>
           </a:pPr>
           <a:r>
             <a:rPr lang="zh-CN" sz="4600" kern="1200"/>
@@ -8508,7 +8809,7 @@
         </a:bodyPr>
         <a:lstStyle/>
         <a:p>
-          <a:pPr marL="0" lvl="0" indent="0" algn="ctr" defTabSz="2044700">
+          <a:pPr lvl="0" algn="ctr" defTabSz="2044700">
             <a:lnSpc>
               <a:spcPct val="90000"/>
             </a:lnSpc>
@@ -8518,7 +8819,6 @@
             <a:spcAft>
               <a:spcPct val="35000"/>
             </a:spcAft>
-            <a:buNone/>
           </a:pPr>
           <a:r>
             <a:rPr lang="zh-CN" sz="4600" kern="1200"/>
@@ -8601,7 +8901,7 @@
         </a:bodyPr>
         <a:lstStyle/>
         <a:p>
-          <a:pPr marL="0" lvl="0" indent="0" algn="l" defTabSz="1244600">
+          <a:pPr lvl="0" algn="l" defTabSz="1244600">
             <a:lnSpc>
               <a:spcPct val="90000"/>
             </a:lnSpc>
@@ -8611,7 +8911,6 @@
             <a:spcAft>
               <a:spcPct val="35000"/>
             </a:spcAft>
-            <a:buNone/>
           </a:pPr>
           <a:r>
             <a:rPr lang="zh-CN" sz="2800" kern="1200" dirty="0"/>
@@ -8700,7 +8999,7 @@
         </a:bodyPr>
         <a:lstStyle/>
         <a:p>
-          <a:pPr marL="0" lvl="0" indent="0" algn="ctr" defTabSz="1244600">
+          <a:pPr lvl="0" algn="ctr" defTabSz="1244600">
             <a:lnSpc>
               <a:spcPct val="90000"/>
             </a:lnSpc>
@@ -8710,7 +9009,6 @@
             <a:spcAft>
               <a:spcPct val="35000"/>
             </a:spcAft>
-            <a:buNone/>
           </a:pPr>
           <a:r>
             <a:rPr lang="en-US" sz="2800" kern="1200"/>
@@ -8830,7 +9128,7 @@
         </a:bodyPr>
         <a:lstStyle/>
         <a:p>
-          <a:pPr marL="0" lvl="0" indent="0" algn="l" defTabSz="1244600">
+          <a:pPr lvl="0" algn="l" defTabSz="1244600">
             <a:lnSpc>
               <a:spcPct val="90000"/>
             </a:lnSpc>
@@ -8840,7 +9138,6 @@
             <a:spcAft>
               <a:spcPct val="35000"/>
             </a:spcAft>
-            <a:buNone/>
           </a:pPr>
           <a:r>
             <a:rPr lang="zh-CN" sz="2800" kern="1200" dirty="0"/>
@@ -8925,7 +9222,7 @@
         </a:bodyPr>
         <a:lstStyle/>
         <a:p>
-          <a:pPr marL="0" lvl="0" indent="0" algn="ctr" defTabSz="1244600">
+          <a:pPr lvl="0" algn="ctr" defTabSz="1244600">
             <a:lnSpc>
               <a:spcPct val="90000"/>
             </a:lnSpc>
@@ -8935,7 +9232,6 @@
             <a:spcAft>
               <a:spcPct val="35000"/>
             </a:spcAft>
-            <a:buNone/>
           </a:pPr>
           <a:r>
             <a:rPr lang="en-US" sz="2800" kern="1200"/>
@@ -9055,7 +9351,7 @@
         </a:bodyPr>
         <a:lstStyle/>
         <a:p>
-          <a:pPr marL="0" lvl="0" indent="0" algn="l" defTabSz="1244600">
+          <a:pPr lvl="0" algn="l" defTabSz="1244600">
             <a:lnSpc>
               <a:spcPct val="90000"/>
             </a:lnSpc>
@@ -9065,7 +9361,6 @@
             <a:spcAft>
               <a:spcPct val="35000"/>
             </a:spcAft>
-            <a:buNone/>
           </a:pPr>
           <a:r>
             <a:rPr lang="zh-CN" sz="2800" kern="1200" dirty="0"/>
@@ -9146,7 +9441,7 @@
         </a:bodyPr>
         <a:lstStyle/>
         <a:p>
-          <a:pPr marL="0" lvl="0" indent="0" algn="ctr" defTabSz="1244600">
+          <a:pPr lvl="0" algn="ctr" defTabSz="1244600">
             <a:lnSpc>
               <a:spcPct val="90000"/>
             </a:lnSpc>
@@ -9156,7 +9451,6 @@
             <a:spcAft>
               <a:spcPct val="35000"/>
             </a:spcAft>
-            <a:buNone/>
           </a:pPr>
           <a:r>
             <a:rPr lang="en-US" sz="2800" kern="1200"/>
@@ -9318,7 +9612,7 @@
         </a:bodyPr>
         <a:lstStyle/>
         <a:p>
-          <a:pPr marL="0" lvl="0" indent="0" algn="l" defTabSz="2044700">
+          <a:pPr lvl="0" algn="l" defTabSz="2044700">
             <a:lnSpc>
               <a:spcPct val="90000"/>
             </a:lnSpc>
@@ -9328,7 +9622,6 @@
             <a:spcAft>
               <a:spcPct val="35000"/>
             </a:spcAft>
-            <a:buNone/>
           </a:pPr>
           <a:r>
             <a:rPr lang="zh-CN" sz="4600" kern="1200"/>
@@ -9429,7 +9722,7 @@
         </a:bodyPr>
         <a:lstStyle/>
         <a:p>
-          <a:pPr marL="0" lvl="0" indent="0" algn="l" defTabSz="2044700">
+          <a:pPr lvl="0" algn="l" defTabSz="2044700">
             <a:lnSpc>
               <a:spcPct val="90000"/>
             </a:lnSpc>
@@ -9439,7 +9732,6 @@
             <a:spcAft>
               <a:spcPct val="35000"/>
             </a:spcAft>
-            <a:buNone/>
           </a:pPr>
           <a:r>
             <a:rPr lang="zh-CN" sz="4600" kern="1200"/>
@@ -9522,7 +9814,7 @@
         </a:bodyPr>
         <a:lstStyle/>
         <a:p>
-          <a:pPr marL="0" lvl="0" indent="0" algn="l" defTabSz="1422400">
+          <a:pPr lvl="0" algn="l" defTabSz="1422400">
             <a:lnSpc>
               <a:spcPct val="90000"/>
             </a:lnSpc>
@@ -9532,7 +9824,6 @@
             <a:spcAft>
               <a:spcPct val="35000"/>
             </a:spcAft>
-            <a:buNone/>
           </a:pPr>
           <a:r>
             <a:rPr lang="en-US" sz="3200" kern="1200" dirty="0"/>
@@ -9625,7 +9916,7 @@
         </a:bodyPr>
         <a:lstStyle/>
         <a:p>
-          <a:pPr marL="0" lvl="0" indent="0" algn="ctr" defTabSz="1422400">
+          <a:pPr lvl="0" algn="ctr" defTabSz="1422400">
             <a:lnSpc>
               <a:spcPct val="90000"/>
             </a:lnSpc>
@@ -9635,7 +9926,6 @@
             <a:spcAft>
               <a:spcPct val="35000"/>
             </a:spcAft>
-            <a:buNone/>
           </a:pPr>
           <a:r>
             <a:rPr lang="en-US" sz="3200" kern="1200"/>
@@ -9755,7 +10045,7 @@
         </a:bodyPr>
         <a:lstStyle/>
         <a:p>
-          <a:pPr marL="0" lvl="0" indent="0" algn="l" defTabSz="1422400">
+          <a:pPr lvl="0" algn="l" defTabSz="1422400">
             <a:lnSpc>
               <a:spcPct val="90000"/>
             </a:lnSpc>
@@ -9765,7 +10055,6 @@
             <a:spcAft>
               <a:spcPct val="35000"/>
             </a:spcAft>
-            <a:buNone/>
           </a:pPr>
           <a:r>
             <a:rPr lang="zh-CN" sz="3200" kern="1200" dirty="0"/>
@@ -9882,7 +10171,7 @@
         </a:bodyPr>
         <a:lstStyle/>
         <a:p>
-          <a:pPr marL="0" lvl="0" indent="0" algn="ctr" defTabSz="1422400">
+          <a:pPr lvl="0" algn="ctr" defTabSz="1422400">
             <a:lnSpc>
               <a:spcPct val="90000"/>
             </a:lnSpc>
@@ -9892,7 +10181,6 @@
             <a:spcAft>
               <a:spcPct val="35000"/>
             </a:spcAft>
-            <a:buNone/>
           </a:pPr>
           <a:r>
             <a:rPr lang="en-US" sz="3200" kern="1200"/>
@@ -10012,7 +10300,7 @@
         </a:bodyPr>
         <a:lstStyle/>
         <a:p>
-          <a:pPr marL="0" lvl="0" indent="0" algn="l" defTabSz="1422400">
+          <a:pPr lvl="0" algn="l" defTabSz="1422400">
             <a:lnSpc>
               <a:spcPct val="90000"/>
             </a:lnSpc>
@@ -10022,7 +10310,6 @@
             <a:spcAft>
               <a:spcPct val="35000"/>
             </a:spcAft>
-            <a:buNone/>
           </a:pPr>
           <a:r>
             <a:rPr lang="zh-CN" sz="3200" kern="1200"/>
@@ -10091,7 +10378,7 @@
         </a:bodyPr>
         <a:lstStyle/>
         <a:p>
-          <a:pPr marL="0" lvl="0" indent="0" algn="ctr" defTabSz="1422400">
+          <a:pPr lvl="0" algn="ctr" defTabSz="1422400">
             <a:lnSpc>
               <a:spcPct val="90000"/>
             </a:lnSpc>
@@ -10101,7 +10388,6 @@
             <a:spcAft>
               <a:spcPct val="35000"/>
             </a:spcAft>
-            <a:buNone/>
           </a:pPr>
           <a:r>
             <a:rPr lang="en-US" sz="3200" kern="1200"/>
@@ -10263,7 +10549,7 @@
         </a:bodyPr>
         <a:lstStyle/>
         <a:p>
-          <a:pPr marL="0" lvl="0" indent="0" algn="l" defTabSz="1377950">
+          <a:pPr lvl="0" algn="l" defTabSz="1377950">
             <a:lnSpc>
               <a:spcPct val="90000"/>
             </a:lnSpc>
@@ -10273,7 +10559,6 @@
             <a:spcAft>
               <a:spcPct val="35000"/>
             </a:spcAft>
-            <a:buNone/>
           </a:pPr>
           <a:r>
             <a:rPr lang="en-US" sz="3100" kern="1200" dirty="0"/>
@@ -10390,7 +10675,7 @@
         </a:bodyPr>
         <a:lstStyle/>
         <a:p>
-          <a:pPr marL="0" lvl="0" indent="0" algn="l" defTabSz="1377950">
+          <a:pPr lvl="0" algn="l" defTabSz="1377950">
             <a:lnSpc>
               <a:spcPct val="90000"/>
             </a:lnSpc>
@@ -10400,7 +10685,6 @@
             <a:spcAft>
               <a:spcPct val="35000"/>
             </a:spcAft>
-            <a:buNone/>
           </a:pPr>
           <a:r>
             <a:rPr lang="en-US" altLang="zh-CN" sz="3100" kern="1200" dirty="0"/>
@@ -10537,7 +10821,7 @@
         </a:bodyPr>
         <a:lstStyle/>
         <a:p>
-          <a:pPr marL="0" lvl="0" indent="0" algn="l" defTabSz="1377950">
+          <a:pPr lvl="0" algn="l" defTabSz="1377950">
             <a:lnSpc>
               <a:spcPct val="90000"/>
             </a:lnSpc>
@@ -10547,7 +10831,6 @@
             <a:spcAft>
               <a:spcPct val="35000"/>
             </a:spcAft>
-            <a:buNone/>
           </a:pPr>
           <a:r>
             <a:rPr lang="en-US" altLang="zh-CN" sz="3100" kern="1200" dirty="0"/>
@@ -13055,7 +13338,7 @@
   </dgm:layoutNode>
   <dgm:extLst>
     <a:ext uri="{4F341089-5ED1-44EC-B178-C955D00A3D55}">
-      <dgm1611:autoBuNodeInfoLst xmlns:dgm1611="http://schemas.microsoft.com/office/drawing/2016/11/diagram">
+      <dgm1611:autoBuNodeInfoLst xmlns:dgm1611="http://schemas.microsoft.com/office/drawing/2016/11/diagram" xmlns="">
         <dgm1611:autoBuNodeInfo lvl="1" ptType="sibTrans">
           <dgm1611:buPr prefix="" leadZeros="0">
             <a:buAutoNum type="arabicParenBoth"/>
@@ -13798,7 +14081,7 @@
   </dgm:layoutNode>
   <dgm:extLst>
     <a:ext uri="{4F341089-5ED1-44EC-B178-C955D00A3D55}">
-      <dgm1611:autoBuNodeInfoLst xmlns:dgm1611="http://schemas.microsoft.com/office/drawing/2016/11/diagram">
+      <dgm1611:autoBuNodeInfoLst xmlns:dgm1611="http://schemas.microsoft.com/office/drawing/2016/11/diagram" xmlns="">
         <dgm1611:autoBuNodeInfo lvl="1" ptType="sibTrans">
           <dgm1611:buPr prefix="" leadZeros="0">
             <a:buAutoNum type="arabicParenBoth"/>
@@ -21645,7 +21928,7 @@
           <a:p>
             <a:fld id="{5A8F3604-515A-41FB-875F-ACBE921EC2F2}" type="datetimeFigureOut">
               <a:rPr lang="en-US" smtClean="0"/>
-              <a:t>3/20/2021</a:t>
+              <a:t>9/15/2021</a:t>
             </a:fld>
             <a:endParaRPr lang="en-US"/>
           </a:p>
@@ -21815,7 +22098,7 @@
           <a:p>
             <a:fld id="{5A8F3604-515A-41FB-875F-ACBE921EC2F2}" type="datetimeFigureOut">
               <a:rPr lang="en-US" smtClean="0"/>
-              <a:t>3/20/2021</a:t>
+              <a:t>9/15/2021</a:t>
             </a:fld>
             <a:endParaRPr lang="en-US"/>
           </a:p>
@@ -21995,7 +22278,7 @@
           <a:p>
             <a:fld id="{5A8F3604-515A-41FB-875F-ACBE921EC2F2}" type="datetimeFigureOut">
               <a:rPr lang="en-US" smtClean="0"/>
-              <a:t>3/20/2021</a:t>
+              <a:t>9/15/2021</a:t>
             </a:fld>
             <a:endParaRPr lang="en-US"/>
           </a:p>
@@ -22203,7 +22486,7 @@
           <a:p>
             <a:fld id="{8663F5F6-EA10-44FF-B365-9A2EC8616DD5}" type="datetimeFigureOut">
               <a:rPr lang="zh-CN" altLang="en-US" smtClean="0"/>
-              <a:t>2021/3/20</a:t>
+              <a:t>2021/9/15</a:t>
             </a:fld>
             <a:endParaRPr lang="zh-CN" altLang="en-US"/>
           </a:p>
@@ -22401,7 +22684,7 @@
           <a:p>
             <a:fld id="{8663F5F6-EA10-44FF-B365-9A2EC8616DD5}" type="datetimeFigureOut">
               <a:rPr lang="zh-CN" altLang="en-US" smtClean="0"/>
-              <a:t>2021/3/20</a:t>
+              <a:t>2021/9/15</a:t>
             </a:fld>
             <a:endParaRPr lang="zh-CN" altLang="en-US"/>
           </a:p>
@@ -22676,7 +22959,7 @@
           <a:p>
             <a:fld id="{8663F5F6-EA10-44FF-B365-9A2EC8616DD5}" type="datetimeFigureOut">
               <a:rPr lang="zh-CN" altLang="en-US" smtClean="0"/>
-              <a:t>2021/3/20</a:t>
+              <a:t>2021/9/15</a:t>
             </a:fld>
             <a:endParaRPr lang="zh-CN" altLang="en-US"/>
           </a:p>
@@ -22941,7 +23224,7 @@
           <a:p>
             <a:fld id="{8663F5F6-EA10-44FF-B365-9A2EC8616DD5}" type="datetimeFigureOut">
               <a:rPr lang="zh-CN" altLang="en-US" smtClean="0"/>
-              <a:t>2021/3/20</a:t>
+              <a:t>2021/9/15</a:t>
             </a:fld>
             <a:endParaRPr lang="zh-CN" altLang="en-US"/>
           </a:p>
@@ -23353,7 +23636,7 @@
           <a:p>
             <a:fld id="{8663F5F6-EA10-44FF-B365-9A2EC8616DD5}" type="datetimeFigureOut">
               <a:rPr lang="zh-CN" altLang="en-US" smtClean="0"/>
-              <a:t>2021/3/20</a:t>
+              <a:t>2021/9/15</a:t>
             </a:fld>
             <a:endParaRPr lang="zh-CN" altLang="en-US"/>
           </a:p>
@@ -23494,7 +23777,7 @@
           <a:p>
             <a:fld id="{8663F5F6-EA10-44FF-B365-9A2EC8616DD5}" type="datetimeFigureOut">
               <a:rPr lang="zh-CN" altLang="en-US" smtClean="0"/>
-              <a:t>2021/3/20</a:t>
+              <a:t>2021/9/15</a:t>
             </a:fld>
             <a:endParaRPr lang="zh-CN" altLang="en-US"/>
           </a:p>
@@ -23607,7 +23890,7 @@
           <a:p>
             <a:fld id="{8663F5F6-EA10-44FF-B365-9A2EC8616DD5}" type="datetimeFigureOut">
               <a:rPr lang="zh-CN" altLang="en-US" smtClean="0"/>
-              <a:t>2021/3/20</a:t>
+              <a:t>2021/9/15</a:t>
             </a:fld>
             <a:endParaRPr lang="zh-CN" altLang="en-US"/>
           </a:p>
@@ -23918,7 +24201,7 @@
           <a:p>
             <a:fld id="{8663F5F6-EA10-44FF-B365-9A2EC8616DD5}" type="datetimeFigureOut">
               <a:rPr lang="zh-CN" altLang="en-US" smtClean="0"/>
-              <a:t>2021/3/20</a:t>
+              <a:t>2021/9/15</a:t>
             </a:fld>
             <a:endParaRPr lang="zh-CN" altLang="en-US"/>
           </a:p>
@@ -24100,7 +24383,7 @@
           <a:p>
             <a:fld id="{5A8F3604-515A-41FB-875F-ACBE921EC2F2}" type="datetimeFigureOut">
               <a:rPr lang="en-US" smtClean="0"/>
-              <a:t>3/20/2021</a:t>
+              <a:t>9/15/2021</a:t>
             </a:fld>
             <a:endParaRPr lang="en-US"/>
           </a:p>
@@ -24376,7 +24659,7 @@
           <a:p>
             <a:fld id="{8663F5F6-EA10-44FF-B365-9A2EC8616DD5}" type="datetimeFigureOut">
               <a:rPr lang="zh-CN" altLang="en-US" smtClean="0"/>
-              <a:t>2021/3/20</a:t>
+              <a:t>2021/9/15</a:t>
             </a:fld>
             <a:endParaRPr lang="zh-CN" altLang="en-US"/>
           </a:p>
@@ -24574,7 +24857,7 @@
           <a:p>
             <a:fld id="{8663F5F6-EA10-44FF-B365-9A2EC8616DD5}" type="datetimeFigureOut">
               <a:rPr lang="zh-CN" altLang="en-US" smtClean="0"/>
-              <a:t>2021/3/20</a:t>
+              <a:t>2021/9/15</a:t>
             </a:fld>
             <a:endParaRPr lang="zh-CN" altLang="en-US"/>
           </a:p>
@@ -24782,7 +25065,7 @@
           <a:p>
             <a:fld id="{8663F5F6-EA10-44FF-B365-9A2EC8616DD5}" type="datetimeFigureOut">
               <a:rPr lang="zh-CN" altLang="en-US" smtClean="0"/>
-              <a:t>2021/3/20</a:t>
+              <a:t>2021/9/15</a:t>
             </a:fld>
             <a:endParaRPr lang="zh-CN" altLang="en-US"/>
           </a:p>
@@ -25040,7 +25323,7 @@
           <a:p>
             <a:fld id="{5A8F3604-515A-41FB-875F-ACBE921EC2F2}" type="datetimeFigureOut">
               <a:rPr lang="en-US" smtClean="0"/>
-              <a:t>3/20/2021</a:t>
+              <a:t>9/15/2021</a:t>
             </a:fld>
             <a:endParaRPr lang="en-US"/>
           </a:p>
@@ -25272,7 +25555,7 @@
           <a:p>
             <a:fld id="{5A8F3604-515A-41FB-875F-ACBE921EC2F2}" type="datetimeFigureOut">
               <a:rPr lang="en-US" smtClean="0"/>
-              <a:t>3/20/2021</a:t>
+              <a:t>9/15/2021</a:t>
             </a:fld>
             <a:endParaRPr lang="en-US"/>
           </a:p>
@@ -25639,7 +25922,7 @@
           <a:p>
             <a:fld id="{5A8F3604-515A-41FB-875F-ACBE921EC2F2}" type="datetimeFigureOut">
               <a:rPr lang="en-US" smtClean="0"/>
-              <a:t>3/20/2021</a:t>
+              <a:t>9/15/2021</a:t>
             </a:fld>
             <a:endParaRPr lang="en-US"/>
           </a:p>
@@ -25757,7 +26040,7 @@
           <a:p>
             <a:fld id="{5A8F3604-515A-41FB-875F-ACBE921EC2F2}" type="datetimeFigureOut">
               <a:rPr lang="en-US" smtClean="0"/>
-              <a:t>3/20/2021</a:t>
+              <a:t>9/15/2021</a:t>
             </a:fld>
             <a:endParaRPr lang="en-US"/>
           </a:p>
@@ -25852,7 +26135,7 @@
           <a:p>
             <a:fld id="{5A8F3604-515A-41FB-875F-ACBE921EC2F2}" type="datetimeFigureOut">
               <a:rPr lang="en-US" smtClean="0"/>
-              <a:t>3/20/2021</a:t>
+              <a:t>9/15/2021</a:t>
             </a:fld>
             <a:endParaRPr lang="en-US"/>
           </a:p>
@@ -26129,7 +26412,7 @@
           <a:p>
             <a:fld id="{5A8F3604-515A-41FB-875F-ACBE921EC2F2}" type="datetimeFigureOut">
               <a:rPr lang="en-US" smtClean="0"/>
-              <a:t>3/20/2021</a:t>
+              <a:t>9/15/2021</a:t>
             </a:fld>
             <a:endParaRPr lang="en-US"/>
           </a:p>
@@ -26382,7 +26665,7 @@
           <a:p>
             <a:fld id="{5A8F3604-515A-41FB-875F-ACBE921EC2F2}" type="datetimeFigureOut">
               <a:rPr lang="en-US" smtClean="0"/>
-              <a:t>3/20/2021</a:t>
+              <a:t>9/15/2021</a:t>
             </a:fld>
             <a:endParaRPr lang="en-US"/>
           </a:p>
@@ -26595,7 +26878,7 @@
           <a:p>
             <a:fld id="{5A8F3604-515A-41FB-875F-ACBE921EC2F2}" type="datetimeFigureOut">
               <a:rPr lang="en-US" smtClean="0"/>
-              <a:t>3/20/2021</a:t>
+              <a:t>9/15/2021</a:t>
             </a:fld>
             <a:endParaRPr lang="en-US"/>
           </a:p>
@@ -27151,7 +27434,7 @@
           <a:p>
             <a:fld id="{8663F5F6-EA10-44FF-B365-9A2EC8616DD5}" type="datetimeFigureOut">
               <a:rPr lang="zh-CN" altLang="en-US" smtClean="0"/>
-              <a:t>2021/3/20</a:t>
+              <a:t>2021/9/15</a:t>
             </a:fld>
             <a:endParaRPr lang="zh-CN" altLang="en-US"/>
           </a:p>
@@ -27630,8 +27913,8 @@
         </p:nvSpPr>
         <p:spPr>
           <a:xfrm>
-            <a:off x="3898828" y="3945374"/>
-            <a:ext cx="4097597" cy="1569660"/>
+            <a:off x="4153705" y="3945374"/>
+            <a:ext cx="3587842" cy="1569660"/>
           </a:xfrm>
           <a:prstGeom prst="rect">
             <a:avLst/>
@@ -27645,19 +27928,40 @@
           <a:p>
             <a:pPr algn="ctr"/>
             <a:r>
+              <a:rPr lang="en-US" altLang="zh-CN" sz="4800" dirty="0" smtClean="0">
+                <a:latin typeface="Times New Roman" panose="02020603050405020304" pitchFamily="18" charset="0"/>
+                <a:cs typeface="Times New Roman" panose="02020603050405020304" pitchFamily="18" charset="0"/>
+              </a:rPr>
+              <a:t>Sept 16</a:t>
+            </a:r>
+            <a:r>
+              <a:rPr lang="en-US" altLang="zh-CN" sz="4800" dirty="0" smtClean="0">
+                <a:latin typeface="Times New Roman" panose="02020603050405020304" pitchFamily="18" charset="0"/>
+                <a:cs typeface="Times New Roman" panose="02020603050405020304" pitchFamily="18" charset="0"/>
+              </a:rPr>
+              <a:t>, </a:t>
+            </a:r>
+            <a:r>
               <a:rPr lang="en-US" altLang="zh-CN" sz="4800" dirty="0">
                 <a:latin typeface="Times New Roman" panose="02020603050405020304" pitchFamily="18" charset="0"/>
                 <a:cs typeface="Times New Roman" panose="02020603050405020304" pitchFamily="18" charset="0"/>
               </a:rPr>
-              <a:t>March 20, 2021</a:t>
+              <a:t>2021</a:t>
             </a:r>
           </a:p>
           <a:p>
             <a:pPr algn="ctr"/>
             <a:r>
-              <a:rPr lang="zh-CN" altLang="en-US" sz="4800" dirty="0"/>
-              <a:t>吴翔</a:t>
+              <a:rPr lang="en-US" altLang="zh-CN" sz="4800" dirty="0" smtClean="0">
+                <a:latin typeface="Times New Roman" panose="02020603050405020304" pitchFamily="18" charset="0"/>
+                <a:cs typeface="Times New Roman" panose="02020603050405020304" pitchFamily="18" charset="0"/>
+              </a:rPr>
+              <a:t>Dr. Xiang Wu</a:t>
             </a:r>
+            <a:endParaRPr lang="zh-CN" altLang="en-US" sz="4800" dirty="0">
+              <a:latin typeface="Times New Roman" panose="02020603050405020304" pitchFamily="18" charset="0"/>
+              <a:cs typeface="Times New Roman" panose="02020603050405020304" pitchFamily="18" charset="0"/>
+            </a:endParaRPr>
           </a:p>
         </p:txBody>
       </p:sp>
@@ -27707,7 +28011,7 @@
                 <a16:creationId xmlns:a16="http://schemas.microsoft.com/office/drawing/2014/main" id="{4351DFE5-F63D-4BE0-BDA9-E3EB88F01AA5}"/>
               </a:ext>
               <a:ext uri="{C183D7F6-B498-43B3-948B-1728B52AA6E4}">
-                <adec:decorative xmlns:adec="http://schemas.microsoft.com/office/drawing/2017/decorative" val="1"/>
+                <adec:decorative xmlns:adec="http://schemas.microsoft.com/office/drawing/2017/decorative" xmlns="" val="1"/>
               </a:ext>
             </a:extLst>
           </p:cNvPr>
@@ -27792,7 +28096,7 @@
                 <a16:creationId xmlns:a16="http://schemas.microsoft.com/office/drawing/2014/main" id="{02DD2BC0-6F29-4B4F-8D61-2DCF6D2E8E73}"/>
               </a:ext>
               <a:ext uri="{C183D7F6-B498-43B3-948B-1728B52AA6E4}">
-                <adec:decorative xmlns:adec="http://schemas.microsoft.com/office/drawing/2017/decorative" val="1"/>
+                <adec:decorative xmlns:adec="http://schemas.microsoft.com/office/drawing/2017/decorative" xmlns="" val="1"/>
               </a:ext>
             </a:extLst>
           </p:cNvPr>
@@ -27945,7 +28249,7 @@
                 <a16:creationId xmlns:a16="http://schemas.microsoft.com/office/drawing/2014/main" id="{42A5316D-ED2F-4F89-B4B4-8D9240B1A348}"/>
               </a:ext>
               <a:ext uri="{C183D7F6-B498-43B3-948B-1728B52AA6E4}">
-                <adec:decorative xmlns:adec="http://schemas.microsoft.com/office/drawing/2017/decorative" val="1"/>
+                <adec:decorative xmlns:adec="http://schemas.microsoft.com/office/drawing/2017/decorative" xmlns="" val="1"/>
               </a:ext>
             </a:extLst>
           </p:cNvPr>
@@ -28768,7 +29072,7 @@
                 <a16:creationId xmlns:a16="http://schemas.microsoft.com/office/drawing/2014/main" id="{A9616D99-AEFB-4C95-84EF-5DEC698D92A7}"/>
               </a:ext>
               <a:ext uri="{C183D7F6-B498-43B3-948B-1728B52AA6E4}">
-                <adec:decorative xmlns:adec="http://schemas.microsoft.com/office/drawing/2017/decorative" val="1"/>
+                <adec:decorative xmlns:adec="http://schemas.microsoft.com/office/drawing/2017/decorative" xmlns="" val="1"/>
               </a:ext>
             </a:extLst>
           </p:cNvPr>
@@ -28843,7 +29147,7 @@
                 <a16:creationId xmlns:a16="http://schemas.microsoft.com/office/drawing/2014/main" id="{D0F97023-F626-4FC5-8C2D-753B5C7F4606}"/>
               </a:ext>
               <a:ext uri="{C183D7F6-B498-43B3-948B-1728B52AA6E4}">
-                <adec:decorative xmlns:adec="http://schemas.microsoft.com/office/drawing/2017/decorative" val="1"/>
+                <adec:decorative xmlns:adec="http://schemas.microsoft.com/office/drawing/2017/decorative" xmlns="" val="1"/>
               </a:ext>
             </a:extLst>
           </p:cNvPr>
@@ -28929,7 +29233,7 @@
                 <a14:useLocalDpi xmlns:a14="http://schemas.microsoft.com/office/drawing/2010/main" val="0"/>
               </a:ext>
               <a:ext uri="{96DAC541-7B7A-43D3-8B79-37D633B846F1}">
-                <asvg:svgBlip xmlns:asvg="http://schemas.microsoft.com/office/drawing/2016/SVG/main" r:embed="rId3"/>
+                <asvg:svgBlip xmlns:asvg="http://schemas.microsoft.com/office/drawing/2016/SVG/main" xmlns="" r:embed="rId3"/>
               </a:ext>
             </a:extLst>
           </a:blip>
@@ -29156,7 +29460,7 @@
                 <a16:creationId xmlns:a16="http://schemas.microsoft.com/office/drawing/2014/main" id="{37E32B78-23DD-4E77-8B9C-7779E3BF20C2}"/>
               </a:ext>
               <a:ext uri="{C183D7F6-B498-43B3-948B-1728B52AA6E4}">
-                <adec:decorative xmlns:adec="http://schemas.microsoft.com/office/drawing/2017/decorative" val="1"/>
+                <adec:decorative xmlns:adec="http://schemas.microsoft.com/office/drawing/2017/decorative" xmlns="" val="1"/>
               </a:ext>
             </a:extLst>
           </p:cNvPr>
@@ -29304,7 +29608,7 @@
                 <a16:creationId xmlns:a16="http://schemas.microsoft.com/office/drawing/2014/main" id="{42285737-90EE-47DC-AC80-8AE156B11969}"/>
               </a:ext>
               <a:ext uri="{C183D7F6-B498-43B3-948B-1728B52AA6E4}">
-                <adec:decorative xmlns:adec="http://schemas.microsoft.com/office/drawing/2017/decorative" val="1"/>
+                <adec:decorative xmlns:adec="http://schemas.microsoft.com/office/drawing/2017/decorative" xmlns="" val="1"/>
               </a:ext>
             </a:extLst>
           </p:cNvPr>
@@ -29484,7 +29788,7 @@
                 <a16:creationId xmlns:a16="http://schemas.microsoft.com/office/drawing/2014/main" id="{B57BDC17-F1B3-455F-BBF1-680AA1F25C06}"/>
               </a:ext>
               <a:ext uri="{C183D7F6-B498-43B3-948B-1728B52AA6E4}">
-                <adec:decorative xmlns:adec="http://schemas.microsoft.com/office/drawing/2017/decorative" val="1"/>
+                <adec:decorative xmlns:adec="http://schemas.microsoft.com/office/drawing/2017/decorative" xmlns="" val="1"/>
               </a:ext>
             </a:extLst>
           </p:cNvPr>
@@ -29515,7 +29819,7 @@
                   <a16:creationId xmlns:a16="http://schemas.microsoft.com/office/drawing/2014/main" id="{64E2FA9A-FEF7-4501-B0EB-5E45EDD2177A}"/>
                 </a:ext>
                 <a:ext uri="{C183D7F6-B498-43B3-948B-1728B52AA6E4}">
-                  <adec:decorative xmlns:adec="http://schemas.microsoft.com/office/drawing/2017/decorative" val="1"/>
+                  <adec:decorative xmlns:adec="http://schemas.microsoft.com/office/drawing/2017/decorative" xmlns="" val="1"/>
                 </a:ext>
               </a:extLst>
             </p:cNvPr>
@@ -29576,7 +29880,7 @@
                   <a16:creationId xmlns:a16="http://schemas.microsoft.com/office/drawing/2014/main" id="{BC38192B-B4CB-47D4-A3B1-10010247F158}"/>
                 </a:ext>
                 <a:ext uri="{C183D7F6-B498-43B3-948B-1728B52AA6E4}">
-                  <adec:decorative xmlns:adec="http://schemas.microsoft.com/office/drawing/2017/decorative" val="1"/>
+                  <adec:decorative xmlns:adec="http://schemas.microsoft.com/office/drawing/2017/decorative" xmlns="" val="1"/>
                 </a:ext>
               </a:extLst>
             </p:cNvPr>
@@ -29637,7 +29941,7 @@
                   <a16:creationId xmlns:a16="http://schemas.microsoft.com/office/drawing/2014/main" id="{96330E33-E171-4B0F-82B5-AF7230399B5C}"/>
                 </a:ext>
                 <a:ext uri="{C183D7F6-B498-43B3-948B-1728B52AA6E4}">
-                  <adec:decorative xmlns:adec="http://schemas.microsoft.com/office/drawing/2017/decorative" val="1"/>
+                  <adec:decorative xmlns:adec="http://schemas.microsoft.com/office/drawing/2017/decorative" xmlns="" val="1"/>
                 </a:ext>
               </a:extLst>
             </p:cNvPr>
@@ -29695,7 +29999,7 @@
                   <a16:creationId xmlns:a16="http://schemas.microsoft.com/office/drawing/2014/main" id="{332B1723-69BF-42D7-B757-0FA059E15256}"/>
                 </a:ext>
                 <a:ext uri="{C183D7F6-B498-43B3-948B-1728B52AA6E4}">
-                  <adec:decorative xmlns:adec="http://schemas.microsoft.com/office/drawing/2017/decorative" val="1"/>
+                  <adec:decorative xmlns:adec="http://schemas.microsoft.com/office/drawing/2017/decorative" xmlns="" val="1"/>
                 </a:ext>
               </a:extLst>
             </p:cNvPr>
@@ -29755,7 +30059,7 @@
                   <a16:creationId xmlns:a16="http://schemas.microsoft.com/office/drawing/2014/main" id="{F115D62D-1E96-48D1-A78D-D370A0BFB9B5}"/>
                 </a:ext>
                 <a:ext uri="{C183D7F6-B498-43B3-948B-1728B52AA6E4}">
-                  <adec:decorative xmlns:adec="http://schemas.microsoft.com/office/drawing/2017/decorative" val="1"/>
+                  <adec:decorative xmlns:adec="http://schemas.microsoft.com/office/drawing/2017/decorative" xmlns="" val="1"/>
                 </a:ext>
               </a:extLst>
             </p:cNvPr>
@@ -29821,7 +30125,7 @@
                   <a16:creationId xmlns:a16="http://schemas.microsoft.com/office/drawing/2014/main" id="{91C2876A-169D-4822-A766-C00578C88B4B}"/>
                 </a:ext>
                 <a:ext uri="{C183D7F6-B498-43B3-948B-1728B52AA6E4}">
-                  <adec:decorative xmlns:adec="http://schemas.microsoft.com/office/drawing/2017/decorative" val="1"/>
+                  <adec:decorative xmlns:adec="http://schemas.microsoft.com/office/drawing/2017/decorative" xmlns="" val="1"/>
                 </a:ext>
               </a:extLst>
             </p:cNvPr>
@@ -30006,7 +30310,7 @@
                 <a16:creationId xmlns:a16="http://schemas.microsoft.com/office/drawing/2014/main" id="{6753252F-4873-4F63-801D-CC719279A7D5}"/>
               </a:ext>
               <a:ext uri="{C183D7F6-B498-43B3-948B-1728B52AA6E4}">
-                <adec:decorative xmlns:adec="http://schemas.microsoft.com/office/drawing/2017/decorative" val="1"/>
+                <adec:decorative xmlns:adec="http://schemas.microsoft.com/office/drawing/2017/decorative" xmlns="" val="1"/>
               </a:ext>
             </a:extLst>
           </p:cNvPr>
@@ -30069,7 +30373,7 @@
                 <a16:creationId xmlns:a16="http://schemas.microsoft.com/office/drawing/2014/main" id="{047C8CCB-F95D-4249-92DD-651249D3535A}"/>
               </a:ext>
               <a:ext uri="{C183D7F6-B498-43B3-948B-1728B52AA6E4}">
-                <adec:decorative xmlns:adec="http://schemas.microsoft.com/office/drawing/2017/decorative" val="1"/>
+                <adec:decorative xmlns:adec="http://schemas.microsoft.com/office/drawing/2017/decorative" xmlns="" val="1"/>
               </a:ext>
             </a:extLst>
           </p:cNvPr>
@@ -30187,6 +30491,14 @@
               </a:rPr>
               <a:t>吸烟量</a:t>
             </a:r>
+            <a:r>
+              <a:rPr lang="en-US" altLang="zh-CN" sz="3600" dirty="0">
+                <a:solidFill>
+                  <a:srgbClr val="FFFFFF"/>
+                </a:solidFill>
+              </a:rPr>
+              <a:t/>
+            </a:r>
             <a:br>
               <a:rPr lang="en-US" altLang="zh-CN" sz="3600" dirty="0">
                 <a:solidFill>
@@ -30201,6 +30513,14 @@
                 </a:solidFill>
               </a:rPr>
               <a:t>血压</a:t>
+            </a:r>
+            <a:r>
+              <a:rPr lang="en-US" altLang="zh-CN" sz="3600" dirty="0">
+                <a:solidFill>
+                  <a:srgbClr val="FFFFFF"/>
+                </a:solidFill>
+              </a:rPr>
+              <a:t/>
             </a:r>
             <a:br>
               <a:rPr lang="en-US" altLang="zh-CN" sz="3600" dirty="0">
@@ -30271,7 +30591,7 @@
                 <a16:creationId xmlns:a16="http://schemas.microsoft.com/office/drawing/2014/main" id="{A4AC5506-6312-4701-8D3C-40187889A947}"/>
               </a:ext>
               <a:ext uri="{C183D7F6-B498-43B3-948B-1728B52AA6E4}">
-                <adec:decorative xmlns:adec="http://schemas.microsoft.com/office/drawing/2017/decorative" val="1"/>
+                <adec:decorative xmlns:adec="http://schemas.microsoft.com/office/drawing/2017/decorative" xmlns="" val="1"/>
               </a:ext>
             </a:extLst>
           </p:cNvPr>
@@ -30739,7 +31059,7 @@
                 <a16:creationId xmlns:a16="http://schemas.microsoft.com/office/drawing/2014/main" id="{43573EFB-E773-46FC-B866-B57ED2E3906B}"/>
               </a:ext>
               <a:ext uri="{C183D7F6-B498-43B3-948B-1728B52AA6E4}">
-                <adec:decorative xmlns:adec="http://schemas.microsoft.com/office/drawing/2017/decorative" val="1"/>
+                <adec:decorative xmlns:adec="http://schemas.microsoft.com/office/drawing/2017/decorative" xmlns="" val="1"/>
               </a:ext>
             </a:extLst>
           </p:cNvPr>
@@ -30916,7 +31236,7 @@
                 <a16:creationId xmlns:a16="http://schemas.microsoft.com/office/drawing/2014/main" id="{37E32B78-23DD-4E77-8B9C-7779E3BF20C2}"/>
               </a:ext>
               <a:ext uri="{C183D7F6-B498-43B3-948B-1728B52AA6E4}">
-                <adec:decorative xmlns:adec="http://schemas.microsoft.com/office/drawing/2017/decorative" val="1"/>
+                <adec:decorative xmlns:adec="http://schemas.microsoft.com/office/drawing/2017/decorative" xmlns="" val="1"/>
               </a:ext>
             </a:extLst>
           </p:cNvPr>
@@ -31100,7 +31420,7 @@
                 <a16:creationId xmlns:a16="http://schemas.microsoft.com/office/drawing/2014/main" id="{B6C29DB0-17E9-42FF-986E-0B7F493F4D24}"/>
               </a:ext>
               <a:ext uri="{C183D7F6-B498-43B3-948B-1728B52AA6E4}">
-                <adec:decorative xmlns:adec="http://schemas.microsoft.com/office/drawing/2017/decorative" val="1"/>
+                <adec:decorative xmlns:adec="http://schemas.microsoft.com/office/drawing/2017/decorative" xmlns="" val="1"/>
               </a:ext>
             </a:extLst>
           </p:cNvPr>
@@ -31210,7 +31530,7 @@
                 <a16:creationId xmlns:a16="http://schemas.microsoft.com/office/drawing/2014/main" id="{115AD956-A5B6-4760-B8B2-11E2DF6B0212}"/>
               </a:ext>
               <a:ext uri="{C183D7F6-B498-43B3-948B-1728B52AA6E4}">
-                <adec:decorative xmlns:adec="http://schemas.microsoft.com/office/drawing/2017/decorative" val="1"/>
+                <adec:decorative xmlns:adec="http://schemas.microsoft.com/office/drawing/2017/decorative" xmlns="" val="1"/>
               </a:ext>
             </a:extLst>
           </p:cNvPr>
@@ -31298,7 +31618,7 @@
                 <a14:useLocalDpi xmlns:a14="http://schemas.microsoft.com/office/drawing/2010/main" val="0"/>
               </a:ext>
               <a:ext uri="{96DAC541-7B7A-43D3-8B79-37D633B846F1}">
-                <asvg:svgBlip xmlns:asvg="http://schemas.microsoft.com/office/drawing/2016/SVG/main" r:embed="rId3"/>
+                <asvg:svgBlip xmlns:asvg="http://schemas.microsoft.com/office/drawing/2016/SVG/main" xmlns="" r:embed="rId3"/>
               </a:ext>
             </a:extLst>
           </a:blip>
@@ -31411,7 +31731,7 @@
                 <a16:creationId xmlns:a16="http://schemas.microsoft.com/office/drawing/2014/main" id="{42A5316D-ED2F-4F89-B4B4-8D9240B1A348}"/>
               </a:ext>
               <a:ext uri="{C183D7F6-B498-43B3-948B-1728B52AA6E4}">
-                <adec:decorative xmlns:adec="http://schemas.microsoft.com/office/drawing/2017/decorative" val="1"/>
+                <adec:decorative xmlns:adec="http://schemas.microsoft.com/office/drawing/2017/decorative" xmlns="" val="1"/>
               </a:ext>
             </a:extLst>
           </p:cNvPr>
@@ -32248,7 +32568,7 @@
                 <a16:creationId xmlns:a16="http://schemas.microsoft.com/office/drawing/2014/main" id="{42A5316D-ED2F-4F89-B4B4-8D9240B1A348}"/>
               </a:ext>
               <a:ext uri="{C183D7F6-B498-43B3-948B-1728B52AA6E4}">
-                <adec:decorative xmlns:adec="http://schemas.microsoft.com/office/drawing/2017/decorative" val="1"/>
+                <adec:decorative xmlns:adec="http://schemas.microsoft.com/office/drawing/2017/decorative" xmlns="" val="1"/>
               </a:ext>
             </a:extLst>
           </p:cNvPr>
@@ -33426,7 +33746,7 @@
                 <a16:creationId xmlns:a16="http://schemas.microsoft.com/office/drawing/2014/main" id="{42285737-90EE-47DC-AC80-8AE156B11969}"/>
               </a:ext>
               <a:ext uri="{C183D7F6-B498-43B3-948B-1728B52AA6E4}">
-                <adec:decorative xmlns:adec="http://schemas.microsoft.com/office/drawing/2017/decorative" val="1"/>
+                <adec:decorative xmlns:adec="http://schemas.microsoft.com/office/drawing/2017/decorative" xmlns="" val="1"/>
               </a:ext>
             </a:extLst>
           </p:cNvPr>
@@ -33606,7 +33926,7 @@
                 <a16:creationId xmlns:a16="http://schemas.microsoft.com/office/drawing/2014/main" id="{B57BDC17-F1B3-455F-BBF1-680AA1F25C06}"/>
               </a:ext>
               <a:ext uri="{C183D7F6-B498-43B3-948B-1728B52AA6E4}">
-                <adec:decorative xmlns:adec="http://schemas.microsoft.com/office/drawing/2017/decorative" val="1"/>
+                <adec:decorative xmlns:adec="http://schemas.microsoft.com/office/drawing/2017/decorative" xmlns="" val="1"/>
               </a:ext>
             </a:extLst>
           </p:cNvPr>
@@ -33637,7 +33957,7 @@
                   <a16:creationId xmlns:a16="http://schemas.microsoft.com/office/drawing/2014/main" id="{64E2FA9A-FEF7-4501-B0EB-5E45EDD2177A}"/>
                 </a:ext>
                 <a:ext uri="{C183D7F6-B498-43B3-948B-1728B52AA6E4}">
-                  <adec:decorative xmlns:adec="http://schemas.microsoft.com/office/drawing/2017/decorative" val="1"/>
+                  <adec:decorative xmlns:adec="http://schemas.microsoft.com/office/drawing/2017/decorative" xmlns="" val="1"/>
                 </a:ext>
               </a:extLst>
             </p:cNvPr>
@@ -33698,7 +34018,7 @@
                   <a16:creationId xmlns:a16="http://schemas.microsoft.com/office/drawing/2014/main" id="{BC38192B-B4CB-47D4-A3B1-10010247F158}"/>
                 </a:ext>
                 <a:ext uri="{C183D7F6-B498-43B3-948B-1728B52AA6E4}">
-                  <adec:decorative xmlns:adec="http://schemas.microsoft.com/office/drawing/2017/decorative" val="1"/>
+                  <adec:decorative xmlns:adec="http://schemas.microsoft.com/office/drawing/2017/decorative" xmlns="" val="1"/>
                 </a:ext>
               </a:extLst>
             </p:cNvPr>
@@ -33759,7 +34079,7 @@
                   <a16:creationId xmlns:a16="http://schemas.microsoft.com/office/drawing/2014/main" id="{96330E33-E171-4B0F-82B5-AF7230399B5C}"/>
                 </a:ext>
                 <a:ext uri="{C183D7F6-B498-43B3-948B-1728B52AA6E4}">
-                  <adec:decorative xmlns:adec="http://schemas.microsoft.com/office/drawing/2017/decorative" val="1"/>
+                  <adec:decorative xmlns:adec="http://schemas.microsoft.com/office/drawing/2017/decorative" xmlns="" val="1"/>
                 </a:ext>
               </a:extLst>
             </p:cNvPr>
@@ -33817,7 +34137,7 @@
                   <a16:creationId xmlns:a16="http://schemas.microsoft.com/office/drawing/2014/main" id="{332B1723-69BF-42D7-B757-0FA059E15256}"/>
                 </a:ext>
                 <a:ext uri="{C183D7F6-B498-43B3-948B-1728B52AA6E4}">
-                  <adec:decorative xmlns:adec="http://schemas.microsoft.com/office/drawing/2017/decorative" val="1"/>
+                  <adec:decorative xmlns:adec="http://schemas.microsoft.com/office/drawing/2017/decorative" xmlns="" val="1"/>
                 </a:ext>
               </a:extLst>
             </p:cNvPr>
@@ -33877,7 +34197,7 @@
                   <a16:creationId xmlns:a16="http://schemas.microsoft.com/office/drawing/2014/main" id="{F115D62D-1E96-48D1-A78D-D370A0BFB9B5}"/>
                 </a:ext>
                 <a:ext uri="{C183D7F6-B498-43B3-948B-1728B52AA6E4}">
-                  <adec:decorative xmlns:adec="http://schemas.microsoft.com/office/drawing/2017/decorative" val="1"/>
+                  <adec:decorative xmlns:adec="http://schemas.microsoft.com/office/drawing/2017/decorative" xmlns="" val="1"/>
                 </a:ext>
               </a:extLst>
             </p:cNvPr>
@@ -33943,7 +34263,7 @@
                   <a16:creationId xmlns:a16="http://schemas.microsoft.com/office/drawing/2014/main" id="{91C2876A-169D-4822-A766-C00578C88B4B}"/>
                 </a:ext>
                 <a:ext uri="{C183D7F6-B498-43B3-948B-1728B52AA6E4}">
-                  <adec:decorative xmlns:adec="http://schemas.microsoft.com/office/drawing/2017/decorative" val="1"/>
+                  <adec:decorative xmlns:adec="http://schemas.microsoft.com/office/drawing/2017/decorative" xmlns="" val="1"/>
                 </a:ext>
               </a:extLst>
             </p:cNvPr>
@@ -34128,7 +34448,7 @@
                 <a16:creationId xmlns:a16="http://schemas.microsoft.com/office/drawing/2014/main" id="{42285737-90EE-47DC-AC80-8AE156B11969}"/>
               </a:ext>
               <a:ext uri="{C183D7F6-B498-43B3-948B-1728B52AA6E4}">
-                <adec:decorative xmlns:adec="http://schemas.microsoft.com/office/drawing/2017/decorative" val="1"/>
+                <adec:decorative xmlns:adec="http://schemas.microsoft.com/office/drawing/2017/decorative" xmlns="" val="1"/>
               </a:ext>
             </a:extLst>
           </p:cNvPr>
@@ -34308,7 +34628,7 @@
                 <a16:creationId xmlns:a16="http://schemas.microsoft.com/office/drawing/2014/main" id="{B57BDC17-F1B3-455F-BBF1-680AA1F25C06}"/>
               </a:ext>
               <a:ext uri="{C183D7F6-B498-43B3-948B-1728B52AA6E4}">
-                <adec:decorative xmlns:adec="http://schemas.microsoft.com/office/drawing/2017/decorative" val="1"/>
+                <adec:decorative xmlns:adec="http://schemas.microsoft.com/office/drawing/2017/decorative" xmlns="" val="1"/>
               </a:ext>
             </a:extLst>
           </p:cNvPr>
@@ -34339,7 +34659,7 @@
                   <a16:creationId xmlns:a16="http://schemas.microsoft.com/office/drawing/2014/main" id="{64E2FA9A-FEF7-4501-B0EB-5E45EDD2177A}"/>
                 </a:ext>
                 <a:ext uri="{C183D7F6-B498-43B3-948B-1728B52AA6E4}">
-                  <adec:decorative xmlns:adec="http://schemas.microsoft.com/office/drawing/2017/decorative" val="1"/>
+                  <adec:decorative xmlns:adec="http://schemas.microsoft.com/office/drawing/2017/decorative" xmlns="" val="1"/>
                 </a:ext>
               </a:extLst>
             </p:cNvPr>
@@ -34400,7 +34720,7 @@
                   <a16:creationId xmlns:a16="http://schemas.microsoft.com/office/drawing/2014/main" id="{BC38192B-B4CB-47D4-A3B1-10010247F158}"/>
                 </a:ext>
                 <a:ext uri="{C183D7F6-B498-43B3-948B-1728B52AA6E4}">
-                  <adec:decorative xmlns:adec="http://schemas.microsoft.com/office/drawing/2017/decorative" val="1"/>
+                  <adec:decorative xmlns:adec="http://schemas.microsoft.com/office/drawing/2017/decorative" xmlns="" val="1"/>
                 </a:ext>
               </a:extLst>
             </p:cNvPr>
@@ -34461,7 +34781,7 @@
                   <a16:creationId xmlns:a16="http://schemas.microsoft.com/office/drawing/2014/main" id="{96330E33-E171-4B0F-82B5-AF7230399B5C}"/>
                 </a:ext>
                 <a:ext uri="{C183D7F6-B498-43B3-948B-1728B52AA6E4}">
-                  <adec:decorative xmlns:adec="http://schemas.microsoft.com/office/drawing/2017/decorative" val="1"/>
+                  <adec:decorative xmlns:adec="http://schemas.microsoft.com/office/drawing/2017/decorative" xmlns="" val="1"/>
                 </a:ext>
               </a:extLst>
             </p:cNvPr>
@@ -34519,7 +34839,7 @@
                   <a16:creationId xmlns:a16="http://schemas.microsoft.com/office/drawing/2014/main" id="{332B1723-69BF-42D7-B757-0FA059E15256}"/>
                 </a:ext>
                 <a:ext uri="{C183D7F6-B498-43B3-948B-1728B52AA6E4}">
-                  <adec:decorative xmlns:adec="http://schemas.microsoft.com/office/drawing/2017/decorative" val="1"/>
+                  <adec:decorative xmlns:adec="http://schemas.microsoft.com/office/drawing/2017/decorative" xmlns="" val="1"/>
                 </a:ext>
               </a:extLst>
             </p:cNvPr>
@@ -34579,7 +34899,7 @@
                   <a16:creationId xmlns:a16="http://schemas.microsoft.com/office/drawing/2014/main" id="{F115D62D-1E96-48D1-A78D-D370A0BFB9B5}"/>
                 </a:ext>
                 <a:ext uri="{C183D7F6-B498-43B3-948B-1728B52AA6E4}">
-                  <adec:decorative xmlns:adec="http://schemas.microsoft.com/office/drawing/2017/decorative" val="1"/>
+                  <adec:decorative xmlns:adec="http://schemas.microsoft.com/office/drawing/2017/decorative" xmlns="" val="1"/>
                 </a:ext>
               </a:extLst>
             </p:cNvPr>
@@ -34645,7 +34965,7 @@
                   <a16:creationId xmlns:a16="http://schemas.microsoft.com/office/drawing/2014/main" id="{91C2876A-169D-4822-A766-C00578C88B4B}"/>
                 </a:ext>
                 <a:ext uri="{C183D7F6-B498-43B3-948B-1728B52AA6E4}">
-                  <adec:decorative xmlns:adec="http://schemas.microsoft.com/office/drawing/2017/decorative" val="1"/>
+                  <adec:decorative xmlns:adec="http://schemas.microsoft.com/office/drawing/2017/decorative" xmlns="" val="1"/>
                 </a:ext>
               </a:extLst>
             </p:cNvPr>
@@ -34830,7 +35150,7 @@
                 <a16:creationId xmlns:a16="http://schemas.microsoft.com/office/drawing/2014/main" id="{46C2E80F-49A6-4372-B103-219D417A55ED}"/>
               </a:ext>
               <a:ext uri="{C183D7F6-B498-43B3-948B-1728B52AA6E4}">
-                <adec:decorative xmlns:adec="http://schemas.microsoft.com/office/drawing/2017/decorative" val="1"/>
+                <adec:decorative xmlns:adec="http://schemas.microsoft.com/office/drawing/2017/decorative" xmlns="" val="1"/>
               </a:ext>
             </a:extLst>
           </p:cNvPr>
@@ -35492,7 +35812,7 @@
                 <a16:creationId xmlns:a16="http://schemas.microsoft.com/office/drawing/2014/main" id="{42A5316D-ED2F-4F89-B4B4-8D9240B1A348}"/>
               </a:ext>
               <a:ext uri="{C183D7F6-B498-43B3-948B-1728B52AA6E4}">
-                <adec:decorative xmlns:adec="http://schemas.microsoft.com/office/drawing/2017/decorative" val="1"/>
+                <adec:decorative xmlns:adec="http://schemas.microsoft.com/office/drawing/2017/decorative" xmlns="" val="1"/>
               </a:ext>
             </a:extLst>
           </p:cNvPr>
@@ -35946,7 +36266,7 @@
                 <a16:creationId xmlns:a16="http://schemas.microsoft.com/office/drawing/2014/main" id="{6753252F-4873-4F63-801D-CC719279A7D5}"/>
               </a:ext>
               <a:ext uri="{C183D7F6-B498-43B3-948B-1728B52AA6E4}">
-                <adec:decorative xmlns:adec="http://schemas.microsoft.com/office/drawing/2017/decorative" val="1"/>
+                <adec:decorative xmlns:adec="http://schemas.microsoft.com/office/drawing/2017/decorative" xmlns="" val="1"/>
               </a:ext>
             </a:extLst>
           </p:cNvPr>
@@ -36009,7 +36329,7 @@
                 <a16:creationId xmlns:a16="http://schemas.microsoft.com/office/drawing/2014/main" id="{047C8CCB-F95D-4249-92DD-651249D3535A}"/>
               </a:ext>
               <a:ext uri="{C183D7F6-B498-43B3-948B-1728B52AA6E4}">
-                <adec:decorative xmlns:adec="http://schemas.microsoft.com/office/drawing/2017/decorative" val="1"/>
+                <adec:decorative xmlns:adec="http://schemas.microsoft.com/office/drawing/2017/decorative" xmlns="" val="1"/>
               </a:ext>
             </a:extLst>
           </p:cNvPr>
@@ -36192,7 +36512,7 @@
                 <a16:creationId xmlns:a16="http://schemas.microsoft.com/office/drawing/2014/main" id="{823AC064-BC96-4F32-8AE1-B2FD38754823}"/>
               </a:ext>
               <a:ext uri="{C183D7F6-B498-43B3-948B-1728B52AA6E4}">
-                <adec:decorative xmlns:adec="http://schemas.microsoft.com/office/drawing/2017/decorative" val="1"/>
+                <adec:decorative xmlns:adec="http://schemas.microsoft.com/office/drawing/2017/decorative" xmlns="" val="1"/>
               </a:ext>
             </a:extLst>
           </p:cNvPr>
@@ -36334,7 +36654,7 @@
                 <a16:creationId xmlns:a16="http://schemas.microsoft.com/office/drawing/2014/main" id="{7E7C77BC-7138-40B1-A15B-20F57A494629}"/>
               </a:ext>
               <a:ext uri="{C183D7F6-B498-43B3-948B-1728B52AA6E4}">
-                <adec:decorative xmlns:adec="http://schemas.microsoft.com/office/drawing/2017/decorative" val="1"/>
+                <adec:decorative xmlns:adec="http://schemas.microsoft.com/office/drawing/2017/decorative" xmlns="" val="1"/>
               </a:ext>
             </a:extLst>
           </p:cNvPr>
@@ -36742,7 +37062,7 @@
                 <a16:creationId xmlns:a16="http://schemas.microsoft.com/office/drawing/2014/main" id="{823AC064-BC96-4F32-8AE1-B2FD38754823}"/>
               </a:ext>
               <a:ext uri="{C183D7F6-B498-43B3-948B-1728B52AA6E4}">
-                <adec:decorative xmlns:adec="http://schemas.microsoft.com/office/drawing/2017/decorative" val="1"/>
+                <adec:decorative xmlns:adec="http://schemas.microsoft.com/office/drawing/2017/decorative" xmlns="" val="1"/>
               </a:ext>
             </a:extLst>
           </p:cNvPr>
@@ -36846,7 +37166,7 @@
                 <a16:creationId xmlns:a16="http://schemas.microsoft.com/office/drawing/2014/main" id="{7E7C77BC-7138-40B1-A15B-20F57A494629}"/>
               </a:ext>
               <a:ext uri="{C183D7F6-B498-43B3-948B-1728B52AA6E4}">
-                <adec:decorative xmlns:adec="http://schemas.microsoft.com/office/drawing/2017/decorative" val="1"/>
+                <adec:decorative xmlns:adec="http://schemas.microsoft.com/office/drawing/2017/decorative" xmlns="" val="1"/>
               </a:ext>
             </a:extLst>
           </p:cNvPr>
@@ -36922,7 +37242,7 @@
                 <a16:creationId xmlns:a16="http://schemas.microsoft.com/office/drawing/2014/main" id="{DB146403-F3D6-484B-B2ED-97F9565D0370}"/>
               </a:ext>
               <a:ext uri="{C183D7F6-B498-43B3-948B-1728B52AA6E4}">
-                <adec:decorative xmlns:adec="http://schemas.microsoft.com/office/drawing/2017/decorative" val="1"/>
+                <adec:decorative xmlns:adec="http://schemas.microsoft.com/office/drawing/2017/decorative" xmlns="" val="1"/>
               </a:ext>
             </a:extLst>
           </p:cNvPr>
